--- a/presentation/presentation.pptx
+++ b/presentation/presentation.pptx
@@ -12,9 +12,10 @@
     <p:sldId id="260" r:id="rId6"/>
     <p:sldId id="261" r:id="rId7"/>
     <p:sldId id="262" r:id="rId8"/>
-    <p:sldId id="263" r:id="rId9"/>
-    <p:sldId id="264" r:id="rId10"/>
-    <p:sldId id="265" r:id="rId11"/>
+    <p:sldId id="266" r:id="rId9"/>
+    <p:sldId id="263" r:id="rId10"/>
+    <p:sldId id="264" r:id="rId11"/>
+    <p:sldId id="265" r:id="rId12"/>
   </p:sldIdLst>
   <p:sldSz cx="12192000" cy="6858000"/>
   <p:notesSz cx="6858000" cy="9144000"/>
@@ -113,6 +114,11 @@
       </a:defRPr>
     </a:lvl9pPr>
   </p:defaultTextStyle>
+  <p:extLst>
+    <p:ext uri="{EFAFB233-063F-42B5-8137-9DF3F51BA10A}">
+      <p15:sldGuideLst xmlns:p15="http://schemas.microsoft.com/office/powerpoint/2012/main"/>
+    </p:ext>
+  </p:extLst>
 </p:presentation>
 </file>
 
@@ -6718,7 +6724,7 @@
 <dgm:dataModel xmlns:dgm="http://schemas.openxmlformats.org/drawingml/2006/diagram" xmlns:a="http://schemas.openxmlformats.org/drawingml/2006/main">
   <dgm:ptLst>
     <dgm:pt modelId="{47318E8F-EE26-43CE-8D70-5CAA9E9F6D81}" type="doc">
-      <dgm:prSet loTypeId="urn:microsoft.com/office/officeart/2005/8/layout/vProcess5" loCatId="process" qsTypeId="urn:microsoft.com/office/officeart/2005/8/quickstyle/simple1" qsCatId="simple" csTypeId="urn:microsoft.com/office/officeart/2005/8/colors/colorful2" csCatId="colorful"/>
+      <dgm:prSet loTypeId="urn:microsoft.com/office/officeart/2005/8/layout/vProcess5" loCatId="process" qsTypeId="urn:microsoft.com/office/officeart/2005/8/quickstyle/simple1" qsCatId="simple" csTypeId="urn:microsoft.com/office/officeart/2005/8/colors/colorful2" csCatId="colorful" phldr="1"/>
       <dgm:spPr/>
       <dgm:t>
         <a:bodyPr/>
@@ -6847,17 +6853,10 @@
         <a:lstStyle/>
         <a:p>
           <a:r>
-            <a:rPr lang="en-US" b="0" i="0" baseline="0"/>
+            <a:rPr lang="en-US" b="0" i="0" baseline="0" dirty="0"/>
             <a:t>Dropped IDs and redundant columns.</a:t>
           </a:r>
-          <a:br>
-            <a:rPr lang="en-US" b="0" i="0" baseline="0"/>
-          </a:br>
-          <a:r>
-            <a:rPr lang="en-US" b="0" i="1" baseline="0"/>
-            <a:t>(Optional: Insert a small table or diagram showing input→feature pipeline.)</a:t>
-          </a:r>
-          <a:endParaRPr lang="en-US"/>
+          <a:endParaRPr lang="en-US" dirty="0"/>
         </a:p>
       </dgm:t>
     </dgm:pt>
@@ -7088,7 +7087,19 @@
         <a:p>
           <a:r>
             <a:rPr lang="en-US" dirty="0"/>
-            <a:t>Accuracy = 0.72 ROC-AUC = 0.76 F1 = 0.59 </a:t>
+            <a:t>Accuracy = 0.72, </a:t>
+          </a:r>
+        </a:p>
+        <a:p>
+          <a:r>
+            <a:rPr lang="en-US" dirty="0"/>
+            <a:t>ROC-AUC = 0.76,</a:t>
+          </a:r>
+        </a:p>
+        <a:p>
+          <a:r>
+            <a:rPr lang="en-US" dirty="0"/>
+            <a:t> F1 = 0.59 </a:t>
           </a:r>
         </a:p>
         <a:p>
@@ -7129,8 +7140,8 @@
         <a:lstStyle/>
         <a:p>
           <a:r>
-            <a:rPr lang="en-US"/>
-            <a:t>Confusion Matrix → show heatmap image (results/final/confusion_matrix.png)</a:t>
+            <a:rPr lang="en-US" dirty="0"/>
+            <a:t>Confusion Matrix → heatmap image</a:t>
           </a:r>
         </a:p>
       </dgm:t>
@@ -7165,8 +7176,8 @@
         <a:lstStyle/>
         <a:p>
           <a:r>
-            <a:rPr lang="en-US"/>
-            <a:t>ROC Curve → show results/final/roc_curve.png</a:t>
+            <a:rPr lang="en-US" dirty="0"/>
+            <a:t>ROC Curve</a:t>
           </a:r>
         </a:p>
       </dgm:t>
@@ -7296,7 +7307,7 @@
       <dgm:spPr/>
     </dgm:pt>
     <dgm:pt modelId="{8D1B9E53-E051-49F1-BF9B-19D0F52FAD70}" type="pres">
-      <dgm:prSet presAssocID="{A2E4D590-585B-44C3-BAC5-1CEC19AA782D}" presName="bgRect" presStyleLbl="bgShp" presStyleIdx="1" presStyleCnt="5"/>
+      <dgm:prSet presAssocID="{A2E4D590-585B-44C3-BAC5-1CEC19AA782D}" presName="bgRect" presStyleLbl="bgShp" presStyleIdx="1" presStyleCnt="5" custScaleY="211594"/>
       <dgm:spPr/>
     </dgm:pt>
     <dgm:pt modelId="{F2DE4D42-71EB-4084-9E62-1B8994BD45F3}" type="pres">
@@ -7332,7 +7343,7 @@
       <dgm:spPr/>
     </dgm:pt>
     <dgm:pt modelId="{39CC69BE-8B83-46DE-AFC4-722A6C313D33}" type="pres">
-      <dgm:prSet presAssocID="{A2E4D590-585B-44C3-BAC5-1CEC19AA782D}" presName="parTx" presStyleLbl="revTx" presStyleIdx="1" presStyleCnt="5">
+      <dgm:prSet presAssocID="{A2E4D590-585B-44C3-BAC5-1CEC19AA782D}" presName="parTx" presStyleLbl="revTx" presStyleIdx="1" presStyleCnt="5" custScaleY="239386">
         <dgm:presLayoutVars>
           <dgm:chMax val="0"/>
           <dgm:chPref val="0"/>
@@ -9954,12 +9965,12 @@
         </a:fontRef>
       </dsp:style>
       <dsp:txBody>
-        <a:bodyPr spcFirstLastPara="0" vert="horz" wrap="square" lIns="68580" tIns="68580" rIns="68580" bIns="68580" numCol="1" spcCol="1270" anchor="ctr" anchorCtr="0">
+        <a:bodyPr spcFirstLastPara="0" vert="horz" wrap="square" lIns="91440" tIns="91440" rIns="91440" bIns="91440" numCol="1" spcCol="1270" anchor="ctr" anchorCtr="0">
           <a:noAutofit/>
         </a:bodyPr>
         <a:lstStyle/>
         <a:p>
-          <a:pPr marL="0" lvl="0" indent="0" algn="l" defTabSz="800100">
+          <a:pPr marL="0" lvl="0" indent="0" algn="l" defTabSz="1066800">
             <a:lnSpc>
               <a:spcPct val="90000"/>
             </a:lnSpc>
@@ -9972,10 +9983,10 @@
             <a:buNone/>
           </a:pPr>
           <a:r>
-            <a:rPr lang="en-US" sz="1800" b="0" i="0" kern="1200" baseline="0"/>
+            <a:rPr lang="en-US" sz="2400" b="0" i="0" kern="1200" baseline="0"/>
             <a:t>Encoded categorical columns (league, position, foot).</a:t>
           </a:r>
-          <a:endParaRPr lang="en-US" sz="1800" kern="1200"/>
+          <a:endParaRPr lang="en-US" sz="2400" kern="1200"/>
         </a:p>
       </dsp:txBody>
       <dsp:txXfrm>
@@ -10035,12 +10046,12 @@
         </a:fontRef>
       </dsp:style>
       <dsp:txBody>
-        <a:bodyPr spcFirstLastPara="0" vert="horz" wrap="square" lIns="68580" tIns="68580" rIns="68580" bIns="68580" numCol="1" spcCol="1270" anchor="ctr" anchorCtr="0">
+        <a:bodyPr spcFirstLastPara="0" vert="horz" wrap="square" lIns="91440" tIns="91440" rIns="91440" bIns="91440" numCol="1" spcCol="1270" anchor="ctr" anchorCtr="0">
           <a:noAutofit/>
         </a:bodyPr>
         <a:lstStyle/>
         <a:p>
-          <a:pPr marL="0" lvl="0" indent="0" algn="l" defTabSz="800100">
+          <a:pPr marL="0" lvl="0" indent="0" algn="l" defTabSz="1066800">
             <a:lnSpc>
               <a:spcPct val="90000"/>
             </a:lnSpc>
@@ -10053,10 +10064,10 @@
             <a:buNone/>
           </a:pPr>
           <a:r>
-            <a:rPr lang="en-US" sz="1800" b="0" i="0" kern="1200" baseline="0"/>
+            <a:rPr lang="en-US" sz="2400" b="0" i="0" kern="1200" baseline="0"/>
             <a:t>Scaled numerical features.</a:t>
           </a:r>
-          <a:endParaRPr lang="en-US" sz="1800" kern="1200"/>
+          <a:endParaRPr lang="en-US" sz="2400" kern="1200"/>
         </a:p>
       </dsp:txBody>
       <dsp:txXfrm>
@@ -10116,12 +10127,12 @@
         </a:fontRef>
       </dsp:style>
       <dsp:txBody>
-        <a:bodyPr spcFirstLastPara="0" vert="horz" wrap="square" lIns="68580" tIns="68580" rIns="68580" bIns="68580" numCol="1" spcCol="1270" anchor="ctr" anchorCtr="0">
+        <a:bodyPr spcFirstLastPara="0" vert="horz" wrap="square" lIns="91440" tIns="91440" rIns="91440" bIns="91440" numCol="1" spcCol="1270" anchor="ctr" anchorCtr="0">
           <a:noAutofit/>
         </a:bodyPr>
         <a:lstStyle/>
         <a:p>
-          <a:pPr marL="0" lvl="0" indent="0" algn="l" defTabSz="800100">
+          <a:pPr marL="0" lvl="0" indent="0" algn="l" defTabSz="1066800">
             <a:lnSpc>
               <a:spcPct val="90000"/>
             </a:lnSpc>
@@ -10134,10 +10145,10 @@
             <a:buNone/>
           </a:pPr>
           <a:r>
-            <a:rPr lang="en-US" sz="1800" b="0" i="0" kern="1200" baseline="0"/>
+            <a:rPr lang="en-US" sz="2400" b="0" i="0" kern="1200" baseline="0"/>
             <a:t>Derived features: goal rate per minute, pre-transfer minutes, market-value ratios.</a:t>
           </a:r>
-          <a:endParaRPr lang="en-US" sz="1800" kern="1200"/>
+          <a:endParaRPr lang="en-US" sz="2400" kern="1200"/>
         </a:p>
       </dsp:txBody>
       <dsp:txXfrm>
@@ -10197,12 +10208,12 @@
         </a:fontRef>
       </dsp:style>
       <dsp:txBody>
-        <a:bodyPr spcFirstLastPara="0" vert="horz" wrap="square" lIns="68580" tIns="68580" rIns="68580" bIns="68580" numCol="1" spcCol="1270" anchor="ctr" anchorCtr="0">
+        <a:bodyPr spcFirstLastPara="0" vert="horz" wrap="square" lIns="91440" tIns="91440" rIns="91440" bIns="91440" numCol="1" spcCol="1270" anchor="ctr" anchorCtr="0">
           <a:noAutofit/>
         </a:bodyPr>
         <a:lstStyle/>
         <a:p>
-          <a:pPr marL="0" lvl="0" indent="0" algn="l" defTabSz="800100">
+          <a:pPr marL="0" lvl="0" indent="0" algn="l" defTabSz="1066800">
             <a:lnSpc>
               <a:spcPct val="90000"/>
             </a:lnSpc>
@@ -10215,17 +10226,10 @@
             <a:buNone/>
           </a:pPr>
           <a:r>
-            <a:rPr lang="en-US" sz="1800" b="0" i="0" kern="1200" baseline="0"/>
+            <a:rPr lang="en-US" sz="2400" b="0" i="0" kern="1200" baseline="0" dirty="0"/>
             <a:t>Dropped IDs and redundant columns.</a:t>
           </a:r>
-          <a:br>
-            <a:rPr lang="en-US" sz="1800" b="0" i="0" kern="1200" baseline="0"/>
-          </a:br>
-          <a:r>
-            <a:rPr lang="en-US" sz="1800" b="0" i="1" kern="1200" baseline="0"/>
-            <a:t>(Optional: Insert a small table or diagram showing input→feature pipeline.)</a:t>
-          </a:r>
-          <a:endParaRPr lang="en-US" sz="1800" kern="1200"/>
+          <a:endParaRPr lang="en-US" sz="2400" kern="1200" dirty="0"/>
         </a:p>
       </dsp:txBody>
       <dsp:txXfrm>
@@ -10492,8 +10496,8 @@
       </dsp:nvSpPr>
       <dsp:spPr>
         <a:xfrm>
-          <a:off x="0" y="4592"/>
-          <a:ext cx="6301601" cy="978270"/>
+          <a:off x="0" y="918"/>
+          <a:ext cx="6301601" cy="794844"/>
         </a:xfrm>
         <a:prstGeom prst="roundRect">
           <a:avLst>
@@ -10534,8 +10538,8 @@
       </dsp:nvSpPr>
       <dsp:spPr>
         <a:xfrm>
-          <a:off x="295926" y="224703"/>
-          <a:ext cx="538048" cy="538048"/>
+          <a:off x="240440" y="179758"/>
+          <a:ext cx="437164" cy="437164"/>
         </a:xfrm>
         <a:prstGeom prst="rect">
           <a:avLst/>
@@ -10584,8 +10588,8 @@
       </dsp:nvSpPr>
       <dsp:spPr>
         <a:xfrm>
-          <a:off x="1129902" y="4592"/>
-          <a:ext cx="5171698" cy="978270"/>
+          <a:off x="918045" y="918"/>
+          <a:ext cx="5383555" cy="794844"/>
         </a:xfrm>
         <a:prstGeom prst="rect">
           <a:avLst/>
@@ -10609,12 +10613,12 @@
         <a:fontRef idx="minor"/>
       </dsp:style>
       <dsp:txBody>
-        <a:bodyPr spcFirstLastPara="0" vert="horz" wrap="square" lIns="103534" tIns="103534" rIns="103534" bIns="103534" numCol="1" spcCol="1270" anchor="ctr" anchorCtr="0">
+        <a:bodyPr spcFirstLastPara="0" vert="horz" wrap="square" lIns="84121" tIns="84121" rIns="84121" bIns="84121" numCol="1" spcCol="1270" anchor="ctr" anchorCtr="0">
           <a:noAutofit/>
         </a:bodyPr>
         <a:lstStyle/>
         <a:p>
-          <a:pPr marL="0" lvl="0" indent="0" algn="l" defTabSz="844550">
+          <a:pPr marL="0" lvl="0" indent="0" algn="l" defTabSz="755650">
             <a:lnSpc>
               <a:spcPct val="90000"/>
             </a:lnSpc>
@@ -10627,15 +10631,15 @@
             <a:buNone/>
           </a:pPr>
           <a:r>
-            <a:rPr lang="en-US" sz="1900" i="1" u="sng" kern="1200"/>
+            <a:rPr lang="en-US" sz="1700" i="1" u="sng" kern="1200"/>
             <a:t>Final Performance on Test Data</a:t>
           </a:r>
-          <a:endParaRPr lang="en-US" sz="1900" kern="1200"/>
+          <a:endParaRPr lang="en-US" sz="1700" kern="1200"/>
         </a:p>
       </dsp:txBody>
       <dsp:txXfrm>
-        <a:off x="1129902" y="4592"/>
-        <a:ext cx="5171698" cy="978270"/>
+        <a:off x="918045" y="918"/>
+        <a:ext cx="5383555" cy="794844"/>
       </dsp:txXfrm>
     </dsp:sp>
     <dsp:sp modelId="{8D1B9E53-E051-49F1-BF9B-19D0F52FAD70}">
@@ -10645,8 +10649,8 @@
       </dsp:nvSpPr>
       <dsp:spPr>
         <a:xfrm>
-          <a:off x="0" y="1227431"/>
-          <a:ext cx="6301601" cy="978270"/>
+          <a:off x="0" y="1104926"/>
+          <a:ext cx="6301601" cy="1681843"/>
         </a:xfrm>
         <a:prstGeom prst="roundRect">
           <a:avLst>
@@ -10687,8 +10691,8 @@
       </dsp:nvSpPr>
       <dsp:spPr>
         <a:xfrm>
-          <a:off x="295926" y="1447541"/>
-          <a:ext cx="538048" cy="538048"/>
+          <a:off x="240440" y="1727266"/>
+          <a:ext cx="437164" cy="437164"/>
         </a:xfrm>
         <a:prstGeom prst="rect">
           <a:avLst/>
@@ -10737,8 +10741,8 @@
       </dsp:nvSpPr>
       <dsp:spPr>
         <a:xfrm>
-          <a:off x="1129902" y="1227431"/>
-          <a:ext cx="5171698" cy="978270"/>
+          <a:off x="918045" y="994474"/>
+          <a:ext cx="5383555" cy="1902747"/>
         </a:xfrm>
         <a:prstGeom prst="rect">
           <a:avLst/>
@@ -10762,12 +10766,12 @@
         <a:fontRef idx="minor"/>
       </dsp:style>
       <dsp:txBody>
-        <a:bodyPr spcFirstLastPara="0" vert="horz" wrap="square" lIns="103534" tIns="103534" rIns="103534" bIns="103534" numCol="1" spcCol="1270" anchor="ctr" anchorCtr="0">
+        <a:bodyPr spcFirstLastPara="0" vert="horz" wrap="square" lIns="84121" tIns="84121" rIns="84121" bIns="84121" numCol="1" spcCol="1270" anchor="ctr" anchorCtr="0">
           <a:noAutofit/>
         </a:bodyPr>
         <a:lstStyle/>
         <a:p>
-          <a:pPr marL="0" lvl="0" indent="0" algn="l" defTabSz="844550">
+          <a:pPr marL="0" lvl="0" indent="0" algn="l" defTabSz="755650">
             <a:lnSpc>
               <a:spcPct val="90000"/>
             </a:lnSpc>
@@ -10780,12 +10784,12 @@
             <a:buNone/>
           </a:pPr>
           <a:r>
-            <a:rPr lang="en-US" sz="1900" kern="1200" dirty="0"/>
-            <a:t>Accuracy = 0.72 ROC-AUC = 0.76 F1 = 0.59 </a:t>
+            <a:rPr lang="en-US" sz="1700" kern="1200" dirty="0"/>
+            <a:t>Accuracy = 0.72, </a:t>
           </a:r>
         </a:p>
         <a:p>
-          <a:pPr marL="0" lvl="0" indent="0" algn="l" defTabSz="844550">
+          <a:pPr marL="0" lvl="0" indent="0" algn="l" defTabSz="755650">
             <a:lnSpc>
               <a:spcPct val="90000"/>
             </a:lnSpc>
@@ -10798,14 +10802,50 @@
             <a:buNone/>
           </a:pPr>
           <a:r>
-            <a:rPr lang="en-US" sz="1900" kern="1200" dirty="0"/>
+            <a:rPr lang="en-US" sz="1700" kern="1200" dirty="0"/>
+            <a:t>ROC-AUC = 0.76,</a:t>
+          </a:r>
+        </a:p>
+        <a:p>
+          <a:pPr marL="0" lvl="0" indent="0" algn="l" defTabSz="755650">
+            <a:lnSpc>
+              <a:spcPct val="90000"/>
+            </a:lnSpc>
+            <a:spcBef>
+              <a:spcPct val="0"/>
+            </a:spcBef>
+            <a:spcAft>
+              <a:spcPct val="35000"/>
+            </a:spcAft>
+            <a:buNone/>
+          </a:pPr>
+          <a:r>
+            <a:rPr lang="en-US" sz="1700" kern="1200" dirty="0"/>
+            <a:t> F1 = 0.59 </a:t>
+          </a:r>
+        </a:p>
+        <a:p>
+          <a:pPr marL="0" lvl="0" indent="0" algn="l" defTabSz="755650">
+            <a:lnSpc>
+              <a:spcPct val="90000"/>
+            </a:lnSpc>
+            <a:spcBef>
+              <a:spcPct val="0"/>
+            </a:spcBef>
+            <a:spcAft>
+              <a:spcPct val="35000"/>
+            </a:spcAft>
+            <a:buNone/>
+          </a:pPr>
+          <a:r>
+            <a:rPr lang="en-US" sz="1700" kern="1200" dirty="0"/>
             <a:t>(for Decline class)</a:t>
           </a:r>
         </a:p>
       </dsp:txBody>
       <dsp:txXfrm>
-        <a:off x="1129902" y="1227431"/>
-        <a:ext cx="5171698" cy="978270"/>
+        <a:off x="918045" y="994474"/>
+        <a:ext cx="5383555" cy="1902747"/>
       </dsp:txXfrm>
     </dsp:sp>
     <dsp:sp modelId="{4AE5731A-7BB6-4695-A210-FC98BF37C4AE}">
@@ -10815,8 +10855,8 @@
       </dsp:nvSpPr>
       <dsp:spPr>
         <a:xfrm>
-          <a:off x="0" y="2450269"/>
-          <a:ext cx="6301601" cy="978270"/>
+          <a:off x="0" y="3095933"/>
+          <a:ext cx="6301601" cy="794844"/>
         </a:xfrm>
         <a:prstGeom prst="roundRect">
           <a:avLst>
@@ -10857,8 +10897,8 @@
       </dsp:nvSpPr>
       <dsp:spPr>
         <a:xfrm>
-          <a:off x="295926" y="2670380"/>
-          <a:ext cx="538048" cy="538048"/>
+          <a:off x="240440" y="3274773"/>
+          <a:ext cx="437164" cy="437164"/>
         </a:xfrm>
         <a:prstGeom prst="rect">
           <a:avLst/>
@@ -10907,8 +10947,8 @@
       </dsp:nvSpPr>
       <dsp:spPr>
         <a:xfrm>
-          <a:off x="1129902" y="2450269"/>
-          <a:ext cx="5171698" cy="978270"/>
+          <a:off x="918045" y="3095933"/>
+          <a:ext cx="5383555" cy="794844"/>
         </a:xfrm>
         <a:prstGeom prst="rect">
           <a:avLst/>
@@ -10932,12 +10972,12 @@
         <a:fontRef idx="minor"/>
       </dsp:style>
       <dsp:txBody>
-        <a:bodyPr spcFirstLastPara="0" vert="horz" wrap="square" lIns="103534" tIns="103534" rIns="103534" bIns="103534" numCol="1" spcCol="1270" anchor="ctr" anchorCtr="0">
+        <a:bodyPr spcFirstLastPara="0" vert="horz" wrap="square" lIns="84121" tIns="84121" rIns="84121" bIns="84121" numCol="1" spcCol="1270" anchor="ctr" anchorCtr="0">
           <a:noAutofit/>
         </a:bodyPr>
         <a:lstStyle/>
         <a:p>
-          <a:pPr marL="0" lvl="0" indent="0" algn="l" defTabSz="844550">
+          <a:pPr marL="0" lvl="0" indent="0" algn="l" defTabSz="755650">
             <a:lnSpc>
               <a:spcPct val="90000"/>
             </a:lnSpc>
@@ -10950,14 +10990,14 @@
             <a:buNone/>
           </a:pPr>
           <a:r>
-            <a:rPr lang="en-US" sz="1900" kern="1200"/>
-            <a:t>Confusion Matrix → show heatmap image (results/final/confusion_matrix.png)</a:t>
+            <a:rPr lang="en-US" sz="1700" kern="1200" dirty="0"/>
+            <a:t>Confusion Matrix → heatmap image</a:t>
           </a:r>
         </a:p>
       </dsp:txBody>
       <dsp:txXfrm>
-        <a:off x="1129902" y="2450269"/>
-        <a:ext cx="5171698" cy="978270"/>
+        <a:off x="918045" y="3095933"/>
+        <a:ext cx="5383555" cy="794844"/>
       </dsp:txXfrm>
     </dsp:sp>
     <dsp:sp modelId="{ABD89449-89C8-44EF-9D09-FA4F241D100C}">
@@ -10967,8 +11007,8 @@
       </dsp:nvSpPr>
       <dsp:spPr>
         <a:xfrm>
-          <a:off x="0" y="3673107"/>
-          <a:ext cx="6301601" cy="978270"/>
+          <a:off x="0" y="4089489"/>
+          <a:ext cx="6301601" cy="794844"/>
         </a:xfrm>
         <a:prstGeom prst="roundRect">
           <a:avLst>
@@ -11009,8 +11049,8 @@
       </dsp:nvSpPr>
       <dsp:spPr>
         <a:xfrm>
-          <a:off x="295926" y="3893218"/>
-          <a:ext cx="538048" cy="538048"/>
+          <a:off x="240440" y="4268329"/>
+          <a:ext cx="437164" cy="437164"/>
         </a:xfrm>
         <a:prstGeom prst="rect">
           <a:avLst/>
@@ -11059,8 +11099,8 @@
       </dsp:nvSpPr>
       <dsp:spPr>
         <a:xfrm>
-          <a:off x="1129902" y="3673107"/>
-          <a:ext cx="5171698" cy="978270"/>
+          <a:off x="918045" y="4089489"/>
+          <a:ext cx="5383555" cy="794844"/>
         </a:xfrm>
         <a:prstGeom prst="rect">
           <a:avLst/>
@@ -11084,12 +11124,12 @@
         <a:fontRef idx="minor"/>
       </dsp:style>
       <dsp:txBody>
-        <a:bodyPr spcFirstLastPara="0" vert="horz" wrap="square" lIns="103534" tIns="103534" rIns="103534" bIns="103534" numCol="1" spcCol="1270" anchor="ctr" anchorCtr="0">
+        <a:bodyPr spcFirstLastPara="0" vert="horz" wrap="square" lIns="84121" tIns="84121" rIns="84121" bIns="84121" numCol="1" spcCol="1270" anchor="ctr" anchorCtr="0">
           <a:noAutofit/>
         </a:bodyPr>
         <a:lstStyle/>
         <a:p>
-          <a:pPr marL="0" lvl="0" indent="0" algn="l" defTabSz="844550">
+          <a:pPr marL="0" lvl="0" indent="0" algn="l" defTabSz="755650">
             <a:lnSpc>
               <a:spcPct val="90000"/>
             </a:lnSpc>
@@ -11102,14 +11142,14 @@
             <a:buNone/>
           </a:pPr>
           <a:r>
-            <a:rPr lang="en-US" sz="1900" kern="1200"/>
-            <a:t>ROC Curve → show results/final/roc_curve.png</a:t>
+            <a:rPr lang="en-US" sz="1700" kern="1200" dirty="0"/>
+            <a:t>ROC Curve</a:t>
           </a:r>
         </a:p>
       </dsp:txBody>
       <dsp:txXfrm>
-        <a:off x="1129902" y="3673107"/>
-        <a:ext cx="5171698" cy="978270"/>
+        <a:off x="918045" y="4089489"/>
+        <a:ext cx="5383555" cy="794844"/>
       </dsp:txXfrm>
     </dsp:sp>
     <dsp:sp modelId="{023439D5-27B7-4BA1-BD08-2DBB94E0D542}">
@@ -11119,8 +11159,8 @@
       </dsp:nvSpPr>
       <dsp:spPr>
         <a:xfrm>
-          <a:off x="0" y="4895945"/>
-          <a:ext cx="6301601" cy="978270"/>
+          <a:off x="0" y="5083045"/>
+          <a:ext cx="6301601" cy="794844"/>
         </a:xfrm>
         <a:prstGeom prst="roundRect">
           <a:avLst>
@@ -11161,8 +11201,8 @@
       </dsp:nvSpPr>
       <dsp:spPr>
         <a:xfrm>
-          <a:off x="295926" y="5116056"/>
-          <a:ext cx="538048" cy="538048"/>
+          <a:off x="240440" y="5261885"/>
+          <a:ext cx="437164" cy="437164"/>
         </a:xfrm>
         <a:prstGeom prst="rect">
           <a:avLst/>
@@ -11211,8 +11251,8 @@
       </dsp:nvSpPr>
       <dsp:spPr>
         <a:xfrm>
-          <a:off x="1129902" y="4895945"/>
-          <a:ext cx="5171698" cy="978270"/>
+          <a:off x="918045" y="5083045"/>
+          <a:ext cx="5383555" cy="794844"/>
         </a:xfrm>
         <a:prstGeom prst="rect">
           <a:avLst/>
@@ -11236,12 +11276,12 @@
         <a:fontRef idx="minor"/>
       </dsp:style>
       <dsp:txBody>
-        <a:bodyPr spcFirstLastPara="0" vert="horz" wrap="square" lIns="103534" tIns="103534" rIns="103534" bIns="103534" numCol="1" spcCol="1270" anchor="ctr" anchorCtr="0">
+        <a:bodyPr spcFirstLastPara="0" vert="horz" wrap="square" lIns="84121" tIns="84121" rIns="84121" bIns="84121" numCol="1" spcCol="1270" anchor="ctr" anchorCtr="0">
           <a:noAutofit/>
         </a:bodyPr>
         <a:lstStyle/>
         <a:p>
-          <a:pPr marL="0" lvl="0" indent="0" algn="l" defTabSz="844550">
+          <a:pPr marL="0" lvl="0" indent="0" algn="l" defTabSz="755650">
             <a:lnSpc>
               <a:spcPct val="90000"/>
             </a:lnSpc>
@@ -11254,14 +11294,14 @@
             <a:buNone/>
           </a:pPr>
           <a:r>
-            <a:rPr lang="en-US" sz="1900" kern="1200"/>
+            <a:rPr lang="en-US" sz="1700" kern="1200"/>
             <a:t>Balanced Precision/Recall between classes.</a:t>
           </a:r>
         </a:p>
       </dsp:txBody>
       <dsp:txXfrm>
-        <a:off x="1129902" y="4895945"/>
-        <a:ext cx="5171698" cy="978270"/>
+        <a:off x="918045" y="5083045"/>
+        <a:ext cx="5383555" cy="794844"/>
       </dsp:txXfrm>
     </dsp:sp>
   </dsp:spTree>
@@ -23582,7 +23622,7 @@
           <a:p>
             <a:fld id="{49B408CF-4893-4A5B-8AB3-B2176D7A23C6}" type="datetimeFigureOut">
               <a:rPr lang="en-US" smtClean="0"/>
-              <a:t>10/23/2025</a:t>
+              <a:t>10/29/2025</a:t>
             </a:fld>
             <a:endParaRPr lang="en-US"/>
           </a:p>
@@ -23780,7 +23820,7 @@
           <a:p>
             <a:fld id="{49B408CF-4893-4A5B-8AB3-B2176D7A23C6}" type="datetimeFigureOut">
               <a:rPr lang="en-US" smtClean="0"/>
-              <a:t>10/23/2025</a:t>
+              <a:t>10/29/2025</a:t>
             </a:fld>
             <a:endParaRPr lang="en-US"/>
           </a:p>
@@ -23988,7 +24028,7 @@
           <a:p>
             <a:fld id="{49B408CF-4893-4A5B-8AB3-B2176D7A23C6}" type="datetimeFigureOut">
               <a:rPr lang="en-US" smtClean="0"/>
-              <a:t>10/23/2025</a:t>
+              <a:t>10/29/2025</a:t>
             </a:fld>
             <a:endParaRPr lang="en-US"/>
           </a:p>
@@ -24186,7 +24226,7 @@
           <a:p>
             <a:fld id="{49B408CF-4893-4A5B-8AB3-B2176D7A23C6}" type="datetimeFigureOut">
               <a:rPr lang="en-US" smtClean="0"/>
-              <a:t>10/23/2025</a:t>
+              <a:t>10/29/2025</a:t>
             </a:fld>
             <a:endParaRPr lang="en-US"/>
           </a:p>
@@ -24461,7 +24501,7 @@
           <a:p>
             <a:fld id="{49B408CF-4893-4A5B-8AB3-B2176D7A23C6}" type="datetimeFigureOut">
               <a:rPr lang="en-US" smtClean="0"/>
-              <a:t>10/23/2025</a:t>
+              <a:t>10/29/2025</a:t>
             </a:fld>
             <a:endParaRPr lang="en-US"/>
           </a:p>
@@ -24726,7 +24766,7 @@
           <a:p>
             <a:fld id="{49B408CF-4893-4A5B-8AB3-B2176D7A23C6}" type="datetimeFigureOut">
               <a:rPr lang="en-US" smtClean="0"/>
-              <a:t>10/23/2025</a:t>
+              <a:t>10/29/2025</a:t>
             </a:fld>
             <a:endParaRPr lang="en-US"/>
           </a:p>
@@ -25138,7 +25178,7 @@
           <a:p>
             <a:fld id="{49B408CF-4893-4A5B-8AB3-B2176D7A23C6}" type="datetimeFigureOut">
               <a:rPr lang="en-US" smtClean="0"/>
-              <a:t>10/23/2025</a:t>
+              <a:t>10/29/2025</a:t>
             </a:fld>
             <a:endParaRPr lang="en-US"/>
           </a:p>
@@ -25279,7 +25319,7 @@
           <a:p>
             <a:fld id="{49B408CF-4893-4A5B-8AB3-B2176D7A23C6}" type="datetimeFigureOut">
               <a:rPr lang="en-US" smtClean="0"/>
-              <a:t>10/23/2025</a:t>
+              <a:t>10/29/2025</a:t>
             </a:fld>
             <a:endParaRPr lang="en-US"/>
           </a:p>
@@ -25392,7 +25432,7 @@
           <a:p>
             <a:fld id="{49B408CF-4893-4A5B-8AB3-B2176D7A23C6}" type="datetimeFigureOut">
               <a:rPr lang="en-US" smtClean="0"/>
-              <a:t>10/23/2025</a:t>
+              <a:t>10/29/2025</a:t>
             </a:fld>
             <a:endParaRPr lang="en-US"/>
           </a:p>
@@ -25703,7 +25743,7 @@
           <a:p>
             <a:fld id="{49B408CF-4893-4A5B-8AB3-B2176D7A23C6}" type="datetimeFigureOut">
               <a:rPr lang="en-US" smtClean="0"/>
-              <a:t>10/23/2025</a:t>
+              <a:t>10/29/2025</a:t>
             </a:fld>
             <a:endParaRPr lang="en-US"/>
           </a:p>
@@ -25991,7 +26031,7 @@
           <a:p>
             <a:fld id="{49B408CF-4893-4A5B-8AB3-B2176D7A23C6}" type="datetimeFigureOut">
               <a:rPr lang="en-US" smtClean="0"/>
-              <a:t>10/23/2025</a:t>
+              <a:t>10/29/2025</a:t>
             </a:fld>
             <a:endParaRPr lang="en-US"/>
           </a:p>
@@ -26232,7 +26272,7 @@
           <a:p>
             <a:fld id="{49B408CF-4893-4A5B-8AB3-B2176D7A23C6}" type="datetimeFigureOut">
               <a:rPr lang="en-US" smtClean="0"/>
-              <a:t>10/23/2025</a:t>
+              <a:t>10/29/2025</a:t>
             </a:fld>
             <a:endParaRPr lang="en-US"/>
           </a:p>
@@ -27207,7 +27247,7 @@
           <a:p>
             <a:pPr algn="l"/>
             <a:r>
-              <a:rPr lang="en-US" sz="4800">
+              <a:rPr lang="en-US" sz="4800" dirty="0">
                 <a:solidFill>
                   <a:srgbClr val="FFFFFF"/>
                 </a:solidFill>
@@ -27235,8 +27275,8 @@
         </p:nvSpPr>
         <p:spPr>
           <a:xfrm>
-            <a:off x="1362636" y="4664636"/>
-            <a:ext cx="10005951" cy="1458258"/>
+            <a:off x="1362636" y="4578703"/>
+            <a:ext cx="10005951" cy="2005779"/>
           </a:xfrm>
         </p:spPr>
         <p:txBody>
@@ -27247,20 +27287,31 @@
           <a:p>
             <a:pPr algn="l"/>
             <a:r>
-              <a:rPr lang="en-US" dirty="0"/>
-              <a:t>DS Bootcamp Capstone – Checkpoint 5 </a:t>
+              <a:rPr lang="en-US" sz="3900" dirty="0"/>
+              <a:t>Arash Karimi</a:t>
             </a:r>
             <a:br>
-              <a:rPr lang="en-US" dirty="0"/>
-            </a:br>
-            <a:br>
-              <a:rPr lang="en-US" dirty="0"/>
+              <a:rPr lang="en-US" sz="3900" dirty="0"/>
             </a:br>
             <a:r>
               <a:rPr lang="en-US" sz="3900" dirty="0"/>
-              <a:t>Arash Karimi</a:t>
+              <a:t>Ferhat Karabatman</a:t>
             </a:r>
-            <a:endParaRPr lang="en-US" dirty="0"/>
+          </a:p>
+          <a:p>
+            <a:pPr algn="l"/>
+            <a:br>
+              <a:rPr lang="en-US" sz="1800" dirty="0"/>
+            </a:br>
+            <a:r>
+              <a:rPr lang="en-US" sz="1800" dirty="0" err="1"/>
+              <a:t>Erdös</a:t>
+            </a:r>
+            <a:r>
+              <a:rPr lang="en-US" sz="1800" dirty="0"/>
+              <a:t> Data Science Bootcamp 2025</a:t>
+            </a:r>
+            <a:endParaRPr lang="en-US" sz="1600" dirty="0"/>
           </a:p>
         </p:txBody>
       </p:sp>
@@ -27278,6 +27329,731 @@
 </file>
 
 <file path=ppt/slides/slide10.xml><?xml version="1.0" encoding="utf-8"?>
+<p:sld xmlns:a="http://schemas.openxmlformats.org/drawingml/2006/main" xmlns:r="http://schemas.openxmlformats.org/officeDocument/2006/relationships" xmlns:p="http://schemas.openxmlformats.org/presentationml/2006/main">
+  <p:cSld>
+    <p:bg>
+      <p:bgPr>
+        <a:solidFill>
+          <a:schemeClr val="bg1"/>
+        </a:solidFill>
+        <a:effectLst/>
+      </p:bgPr>
+    </p:bg>
+    <p:spTree>
+      <p:nvGrpSpPr>
+        <p:cNvPr id="1" name=""/>
+        <p:cNvGrpSpPr/>
+        <p:nvPr/>
+      </p:nvGrpSpPr>
+      <p:grpSpPr>
+        <a:xfrm>
+          <a:off x="0" y="0"/>
+          <a:ext cx="0" cy="0"/>
+          <a:chOff x="0" y="0"/>
+          <a:chExt cx="0" cy="0"/>
+        </a:xfrm>
+      </p:grpSpPr>
+      <p:sp useBgFill="1">
+        <p:nvSpPr>
+          <p:cNvPr id="10" name="Rectangle 9">
+            <a:extLst>
+              <a:ext uri="{FF2B5EF4-FFF2-40B4-BE49-F238E27FC236}">
+                <a16:creationId xmlns:a16="http://schemas.microsoft.com/office/drawing/2014/main" id="{D9A7F3BF-8763-4074-AD77-92790AF314D1}"/>
+              </a:ext>
+              <a:ext uri="{C183D7F6-B498-43B3-948B-1728B52AA6E4}">
+                <adec:decorative xmlns:adec="http://schemas.microsoft.com/office/drawing/2017/decorative" val="1"/>
+              </a:ext>
+            </a:extLst>
+          </p:cNvPr>
+          <p:cNvSpPr>
+            <a:spLocks noGrp="1" noRot="1" noChangeAspect="1" noMove="1" noResize="1" noEditPoints="1" noAdjustHandles="1" noChangeArrowheads="1" noChangeShapeType="1" noTextEdit="1"/>
+          </p:cNvSpPr>
+          <p:nvPr>
+            <p:extLst>
+              <p:ext uri="{386F3935-93C4-4BCD-93E2-E3B085C9AB24}">
+                <p16:designElem xmlns:p16="http://schemas.microsoft.com/office/powerpoint/2015/main" val="1"/>
+              </p:ext>
+            </p:extLst>
+          </p:nvPr>
+        </p:nvSpPr>
+        <p:spPr>
+          <a:xfrm>
+            <a:off x="0" y="0"/>
+            <a:ext cx="12192000" cy="6858000"/>
+          </a:xfrm>
+          <a:prstGeom prst="rect">
+            <a:avLst/>
+          </a:prstGeom>
+          <a:ln>
+            <a:noFill/>
+          </a:ln>
+        </p:spPr>
+        <p:style>
+          <a:lnRef idx="2">
+            <a:schemeClr val="accent1">
+              <a:shade val="50000"/>
+            </a:schemeClr>
+          </a:lnRef>
+          <a:fillRef idx="1">
+            <a:schemeClr val="accent1"/>
+          </a:fillRef>
+          <a:effectRef idx="0">
+            <a:schemeClr val="accent1"/>
+          </a:effectRef>
+          <a:fontRef idx="minor">
+            <a:schemeClr val="lt1"/>
+          </a:fontRef>
+        </p:style>
+        <p:txBody>
+          <a:bodyPr rtlCol="0" anchor="ctr"/>
+          <a:lstStyle/>
+          <a:p>
+            <a:pPr algn="ctr"/>
+            <a:endParaRPr lang="en-US"/>
+          </a:p>
+        </p:txBody>
+      </p:sp>
+      <p:sp>
+        <p:nvSpPr>
+          <p:cNvPr id="2" name="Title 1">
+            <a:extLst>
+              <a:ext uri="{FF2B5EF4-FFF2-40B4-BE49-F238E27FC236}">
+                <a16:creationId xmlns:a16="http://schemas.microsoft.com/office/drawing/2014/main" id="{B92FA667-82AD-BB13-1E68-DD6F5D8CBC7B}"/>
+              </a:ext>
+            </a:extLst>
+          </p:cNvPr>
+          <p:cNvSpPr>
+            <a:spLocks noGrp="1"/>
+          </p:cNvSpPr>
+          <p:nvPr>
+            <p:ph type="title"/>
+          </p:nvPr>
+        </p:nvSpPr>
+        <p:spPr>
+          <a:xfrm>
+            <a:off x="1188069" y="381935"/>
+            <a:ext cx="9356106" cy="1200329"/>
+          </a:xfrm>
+        </p:spPr>
+        <p:txBody>
+          <a:bodyPr anchor="t">
+            <a:normAutofit/>
+          </a:bodyPr>
+          <a:lstStyle/>
+          <a:p>
+            <a:r>
+              <a:rPr lang="en-US" sz="6800"/>
+              <a:t>Limitations &amp; Next Steps</a:t>
+            </a:r>
+          </a:p>
+        </p:txBody>
+      </p:sp>
+      <p:grpSp>
+        <p:nvGrpSpPr>
+          <p:cNvPr id="12" name="Group 11">
+            <a:extLst>
+              <a:ext uri="{FF2B5EF4-FFF2-40B4-BE49-F238E27FC236}">
+                <a16:creationId xmlns:a16="http://schemas.microsoft.com/office/drawing/2014/main" id="{7A9648D6-B41B-42D0-A817-AE2607B0B5B8}"/>
+              </a:ext>
+              <a:ext uri="{C183D7F6-B498-43B3-948B-1728B52AA6E4}">
+                <adec:decorative xmlns:adec="http://schemas.microsoft.com/office/drawing/2017/decorative" val="1"/>
+              </a:ext>
+            </a:extLst>
+          </p:cNvPr>
+          <p:cNvGrpSpPr>
+            <a:grpSpLocks noGrp="1" noUngrp="1" noRot="1" noChangeAspect="1" noMove="1" noResize="1"/>
+          </p:cNvGrpSpPr>
+          <p:nvPr>
+            <p:extLst>
+              <p:ext uri="{386F3935-93C4-4BCD-93E2-E3B085C9AB24}">
+                <p16:designElem xmlns:p16="http://schemas.microsoft.com/office/powerpoint/2015/main" val="1"/>
+              </p:ext>
+            </p:extLst>
+          </p:nvPr>
+        </p:nvGrpSpPr>
+        <p:grpSpPr>
+          <a:xfrm>
+            <a:off x="10994200" y="554152"/>
+            <a:ext cx="574177" cy="1075866"/>
+            <a:chOff x="10994200" y="554152"/>
+            <a:chExt cx="574177" cy="1075866"/>
+          </a:xfrm>
+        </p:grpSpPr>
+        <p:sp>
+          <p:nvSpPr>
+            <p:cNvPr id="13" name="Graphic 11">
+              <a:extLst>
+                <a:ext uri="{FF2B5EF4-FFF2-40B4-BE49-F238E27FC236}">
+                  <a16:creationId xmlns:a16="http://schemas.microsoft.com/office/drawing/2014/main" id="{6CB927A4-E432-4310-9CD5-E89FF5063179}"/>
+                </a:ext>
+                <a:ext uri="{C183D7F6-B498-43B3-948B-1728B52AA6E4}">
+                  <adec:decorative xmlns:adec="http://schemas.microsoft.com/office/drawing/2017/decorative" val="1"/>
+                </a:ext>
+              </a:extLst>
+            </p:cNvPr>
+            <p:cNvSpPr/>
+            <p:nvPr>
+              <p:extLst>
+                <p:ext uri="{386F3935-93C4-4BCD-93E2-E3B085C9AB24}">
+                  <p16:designElem xmlns:p16="http://schemas.microsoft.com/office/powerpoint/2015/main" val="1"/>
+                </p:ext>
+              </p:extLst>
+            </p:nvPr>
+          </p:nvSpPr>
+          <p:spPr>
+            <a:xfrm>
+              <a:off x="11013369" y="554152"/>
+              <a:ext cx="171515" cy="171515"/>
+            </a:xfrm>
+            <a:custGeom>
+              <a:avLst/>
+              <a:gdLst>
+                <a:gd name="connsiteX0" fmla="*/ 159874 w 171515"/>
+                <a:gd name="connsiteY0" fmla="*/ 74116 h 171515"/>
+                <a:gd name="connsiteX1" fmla="*/ 97399 w 171515"/>
+                <a:gd name="connsiteY1" fmla="*/ 74116 h 171515"/>
+                <a:gd name="connsiteX2" fmla="*/ 97399 w 171515"/>
+                <a:gd name="connsiteY2" fmla="*/ 11641 h 171515"/>
+                <a:gd name="connsiteX3" fmla="*/ 85758 w 171515"/>
+                <a:gd name="connsiteY3" fmla="*/ 0 h 171515"/>
+                <a:gd name="connsiteX4" fmla="*/ 74116 w 171515"/>
+                <a:gd name="connsiteY4" fmla="*/ 11641 h 171515"/>
+                <a:gd name="connsiteX5" fmla="*/ 74116 w 171515"/>
+                <a:gd name="connsiteY5" fmla="*/ 74116 h 171515"/>
+                <a:gd name="connsiteX6" fmla="*/ 11641 w 171515"/>
+                <a:gd name="connsiteY6" fmla="*/ 74116 h 171515"/>
+                <a:gd name="connsiteX7" fmla="*/ 0 w 171515"/>
+                <a:gd name="connsiteY7" fmla="*/ 85758 h 171515"/>
+                <a:gd name="connsiteX8" fmla="*/ 11641 w 171515"/>
+                <a:gd name="connsiteY8" fmla="*/ 97399 h 171515"/>
+                <a:gd name="connsiteX9" fmla="*/ 74116 w 171515"/>
+                <a:gd name="connsiteY9" fmla="*/ 97399 h 171515"/>
+                <a:gd name="connsiteX10" fmla="*/ 74116 w 171515"/>
+                <a:gd name="connsiteY10" fmla="*/ 159874 h 171515"/>
+                <a:gd name="connsiteX11" fmla="*/ 85758 w 171515"/>
+                <a:gd name="connsiteY11" fmla="*/ 171515 h 171515"/>
+                <a:gd name="connsiteX12" fmla="*/ 97399 w 171515"/>
+                <a:gd name="connsiteY12" fmla="*/ 159874 h 171515"/>
+                <a:gd name="connsiteX13" fmla="*/ 97399 w 171515"/>
+                <a:gd name="connsiteY13" fmla="*/ 97399 h 171515"/>
+                <a:gd name="connsiteX14" fmla="*/ 159874 w 171515"/>
+                <a:gd name="connsiteY14" fmla="*/ 97399 h 171515"/>
+                <a:gd name="connsiteX15" fmla="*/ 171515 w 171515"/>
+                <a:gd name="connsiteY15" fmla="*/ 85758 h 171515"/>
+                <a:gd name="connsiteX16" fmla="*/ 159874 w 171515"/>
+                <a:gd name="connsiteY16" fmla="*/ 74116 h 171515"/>
+              </a:gdLst>
+              <a:ahLst/>
+              <a:cxnLst>
+                <a:cxn ang="0">
+                  <a:pos x="connsiteX0" y="connsiteY0"/>
+                </a:cxn>
+                <a:cxn ang="0">
+                  <a:pos x="connsiteX1" y="connsiteY1"/>
+                </a:cxn>
+                <a:cxn ang="0">
+                  <a:pos x="connsiteX2" y="connsiteY2"/>
+                </a:cxn>
+                <a:cxn ang="0">
+                  <a:pos x="connsiteX3" y="connsiteY3"/>
+                </a:cxn>
+                <a:cxn ang="0">
+                  <a:pos x="connsiteX4" y="connsiteY4"/>
+                </a:cxn>
+                <a:cxn ang="0">
+                  <a:pos x="connsiteX5" y="connsiteY5"/>
+                </a:cxn>
+                <a:cxn ang="0">
+                  <a:pos x="connsiteX6" y="connsiteY6"/>
+                </a:cxn>
+                <a:cxn ang="0">
+                  <a:pos x="connsiteX7" y="connsiteY7"/>
+                </a:cxn>
+                <a:cxn ang="0">
+                  <a:pos x="connsiteX8" y="connsiteY8"/>
+                </a:cxn>
+                <a:cxn ang="0">
+                  <a:pos x="connsiteX9" y="connsiteY9"/>
+                </a:cxn>
+                <a:cxn ang="0">
+                  <a:pos x="connsiteX10" y="connsiteY10"/>
+                </a:cxn>
+                <a:cxn ang="0">
+                  <a:pos x="connsiteX11" y="connsiteY11"/>
+                </a:cxn>
+                <a:cxn ang="0">
+                  <a:pos x="connsiteX12" y="connsiteY12"/>
+                </a:cxn>
+                <a:cxn ang="0">
+                  <a:pos x="connsiteX13" y="connsiteY13"/>
+                </a:cxn>
+                <a:cxn ang="0">
+                  <a:pos x="connsiteX14" y="connsiteY14"/>
+                </a:cxn>
+                <a:cxn ang="0">
+                  <a:pos x="connsiteX15" y="connsiteY15"/>
+                </a:cxn>
+                <a:cxn ang="0">
+                  <a:pos x="connsiteX16" y="connsiteY16"/>
+                </a:cxn>
+              </a:cxnLst>
+              <a:rect l="l" t="t" r="r" b="b"/>
+              <a:pathLst>
+                <a:path w="171515" h="171515">
+                  <a:moveTo>
+                    <a:pt x="159874" y="74116"/>
+                  </a:moveTo>
+                  <a:lnTo>
+                    <a:pt x="97399" y="74116"/>
+                  </a:lnTo>
+                  <a:lnTo>
+                    <a:pt x="97399" y="11641"/>
+                  </a:lnTo>
+                  <a:cubicBezTo>
+                    <a:pt x="97399" y="5212"/>
+                    <a:pt x="92187" y="0"/>
+                    <a:pt x="85758" y="0"/>
+                  </a:cubicBezTo>
+                  <a:cubicBezTo>
+                    <a:pt x="79328" y="0"/>
+                    <a:pt x="74116" y="5212"/>
+                    <a:pt x="74116" y="11641"/>
+                  </a:cubicBezTo>
+                  <a:lnTo>
+                    <a:pt x="74116" y="74116"/>
+                  </a:lnTo>
+                  <a:lnTo>
+                    <a:pt x="11641" y="74116"/>
+                  </a:lnTo>
+                  <a:cubicBezTo>
+                    <a:pt x="5212" y="74116"/>
+                    <a:pt x="0" y="79328"/>
+                    <a:pt x="0" y="85758"/>
+                  </a:cubicBezTo>
+                  <a:cubicBezTo>
+                    <a:pt x="0" y="92187"/>
+                    <a:pt x="5212" y="97399"/>
+                    <a:pt x="11641" y="97399"/>
+                  </a:cubicBezTo>
+                  <a:lnTo>
+                    <a:pt x="74116" y="97399"/>
+                  </a:lnTo>
+                  <a:lnTo>
+                    <a:pt x="74116" y="159874"/>
+                  </a:lnTo>
+                  <a:cubicBezTo>
+                    <a:pt x="74116" y="166303"/>
+                    <a:pt x="79328" y="171515"/>
+                    <a:pt x="85758" y="171515"/>
+                  </a:cubicBezTo>
+                  <a:cubicBezTo>
+                    <a:pt x="92187" y="171515"/>
+                    <a:pt x="97399" y="166303"/>
+                    <a:pt x="97399" y="159874"/>
+                  </a:cubicBezTo>
+                  <a:lnTo>
+                    <a:pt x="97399" y="97399"/>
+                  </a:lnTo>
+                  <a:lnTo>
+                    <a:pt x="159874" y="97399"/>
+                  </a:lnTo>
+                  <a:cubicBezTo>
+                    <a:pt x="166303" y="97399"/>
+                    <a:pt x="171515" y="92187"/>
+                    <a:pt x="171515" y="85758"/>
+                  </a:cubicBezTo>
+                  <a:cubicBezTo>
+                    <a:pt x="171515" y="79328"/>
+                    <a:pt x="166303" y="74116"/>
+                    <a:pt x="159874" y="74116"/>
+                  </a:cubicBezTo>
+                  <a:close/>
+                </a:path>
+              </a:pathLst>
+            </a:custGeom>
+            <a:solidFill>
+              <a:schemeClr val="accent2"/>
+            </a:solidFill>
+            <a:ln w="776" cap="flat">
+              <a:noFill/>
+              <a:prstDash val="solid"/>
+              <a:miter/>
+            </a:ln>
+          </p:spPr>
+          <p:txBody>
+            <a:bodyPr rtlCol="0" anchor="ctr"/>
+            <a:lstStyle/>
+            <a:p>
+              <a:endParaRPr lang="en-US"/>
+            </a:p>
+          </p:txBody>
+        </p:sp>
+        <p:sp>
+          <p:nvSpPr>
+            <p:cNvPr id="14" name="Graphic 10">
+              <a:extLst>
+                <a:ext uri="{FF2B5EF4-FFF2-40B4-BE49-F238E27FC236}">
+                  <a16:creationId xmlns:a16="http://schemas.microsoft.com/office/drawing/2014/main" id="{E3020543-B24B-4EC4-8FFC-8DD88EEA91A8}"/>
+                </a:ext>
+                <a:ext uri="{C183D7F6-B498-43B3-948B-1728B52AA6E4}">
+                  <adec:decorative xmlns:adec="http://schemas.microsoft.com/office/drawing/2017/decorative" val="1"/>
+                </a:ext>
+              </a:extLst>
+            </p:cNvPr>
+            <p:cNvSpPr/>
+            <p:nvPr>
+              <p:extLst>
+                <p:ext uri="{386F3935-93C4-4BCD-93E2-E3B085C9AB24}">
+                  <p16:designElem xmlns:p16="http://schemas.microsoft.com/office/powerpoint/2015/main" val="1"/>
+                </p:ext>
+              </p:extLst>
+            </p:nvPr>
+          </p:nvSpPr>
+          <p:spPr>
+            <a:xfrm>
+              <a:off x="11455951" y="837005"/>
+              <a:ext cx="112426" cy="112426"/>
+            </a:xfrm>
+            <a:custGeom>
+              <a:avLst/>
+              <a:gdLst>
+                <a:gd name="connsiteX0" fmla="*/ 112426 w 112426"/>
+                <a:gd name="connsiteY0" fmla="*/ 56213 h 112426"/>
+                <a:gd name="connsiteX1" fmla="*/ 56213 w 112426"/>
+                <a:gd name="connsiteY1" fmla="*/ 112426 h 112426"/>
+                <a:gd name="connsiteX2" fmla="*/ 0 w 112426"/>
+                <a:gd name="connsiteY2" fmla="*/ 56213 h 112426"/>
+                <a:gd name="connsiteX3" fmla="*/ 56213 w 112426"/>
+                <a:gd name="connsiteY3" fmla="*/ 0 h 112426"/>
+                <a:gd name="connsiteX4" fmla="*/ 112426 w 112426"/>
+                <a:gd name="connsiteY4" fmla="*/ 56213 h 112426"/>
+              </a:gdLst>
+              <a:ahLst/>
+              <a:cxnLst>
+                <a:cxn ang="0">
+                  <a:pos x="connsiteX0" y="connsiteY0"/>
+                </a:cxn>
+                <a:cxn ang="0">
+                  <a:pos x="connsiteX1" y="connsiteY1"/>
+                </a:cxn>
+                <a:cxn ang="0">
+                  <a:pos x="connsiteX2" y="connsiteY2"/>
+                </a:cxn>
+                <a:cxn ang="0">
+                  <a:pos x="connsiteX3" y="connsiteY3"/>
+                </a:cxn>
+                <a:cxn ang="0">
+                  <a:pos x="connsiteX4" y="connsiteY4"/>
+                </a:cxn>
+              </a:cxnLst>
+              <a:rect l="l" t="t" r="r" b="b"/>
+              <a:pathLst>
+                <a:path w="112426" h="112426">
+                  <a:moveTo>
+                    <a:pt x="112426" y="56213"/>
+                  </a:moveTo>
+                  <a:cubicBezTo>
+                    <a:pt x="112426" y="87259"/>
+                    <a:pt x="87259" y="112426"/>
+                    <a:pt x="56213" y="112426"/>
+                  </a:cubicBezTo>
+                  <a:cubicBezTo>
+                    <a:pt x="25167" y="112426"/>
+                    <a:pt x="0" y="87259"/>
+                    <a:pt x="0" y="56213"/>
+                  </a:cubicBezTo>
+                  <a:cubicBezTo>
+                    <a:pt x="0" y="25167"/>
+                    <a:pt x="25167" y="0"/>
+                    <a:pt x="56213" y="0"/>
+                  </a:cubicBezTo>
+                  <a:cubicBezTo>
+                    <a:pt x="87259" y="0"/>
+                    <a:pt x="112426" y="25167"/>
+                    <a:pt x="112426" y="56213"/>
+                  </a:cubicBezTo>
+                  <a:close/>
+                </a:path>
+              </a:pathLst>
+            </a:custGeom>
+            <a:solidFill>
+              <a:schemeClr val="accent2"/>
+            </a:solidFill>
+            <a:ln w="516" cap="flat">
+              <a:noFill/>
+              <a:prstDash val="solid"/>
+              <a:miter/>
+            </a:ln>
+          </p:spPr>
+          <p:txBody>
+            <a:bodyPr rtlCol="0" anchor="ctr"/>
+            <a:lstStyle/>
+            <a:p>
+              <a:endParaRPr lang="en-US"/>
+            </a:p>
+          </p:txBody>
+        </p:sp>
+        <p:sp>
+          <p:nvSpPr>
+            <p:cNvPr id="15" name="Graphic 12">
+              <a:extLst>
+                <a:ext uri="{FF2B5EF4-FFF2-40B4-BE49-F238E27FC236}">
+                  <a16:creationId xmlns:a16="http://schemas.microsoft.com/office/drawing/2014/main" id="{1453BF6C-B012-48B7-B4E8-6D7AC7C27D02}"/>
+                </a:ext>
+                <a:ext uri="{C183D7F6-B498-43B3-948B-1728B52AA6E4}">
+                  <adec:decorative xmlns:adec="http://schemas.microsoft.com/office/drawing/2017/decorative" val="1"/>
+                </a:ext>
+              </a:extLst>
+            </p:cNvPr>
+            <p:cNvSpPr/>
+            <p:nvPr>
+              <p:extLst>
+                <p:ext uri="{386F3935-93C4-4BCD-93E2-E3B085C9AB24}">
+                  <p16:designElem xmlns:p16="http://schemas.microsoft.com/office/powerpoint/2015/main" val="1"/>
+                </p:ext>
+              </p:extLst>
+            </p:nvPr>
+          </p:nvSpPr>
+          <p:spPr>
+            <a:xfrm>
+              <a:off x="10994200" y="1472473"/>
+              <a:ext cx="157545" cy="157545"/>
+            </a:xfrm>
+            <a:custGeom>
+              <a:avLst/>
+              <a:gdLst>
+                <a:gd name="connsiteX0" fmla="*/ 78773 w 157545"/>
+                <a:gd name="connsiteY0" fmla="*/ 23283 h 157545"/>
+                <a:gd name="connsiteX1" fmla="*/ 134262 w 157545"/>
+                <a:gd name="connsiteY1" fmla="*/ 78773 h 157545"/>
+                <a:gd name="connsiteX2" fmla="*/ 78773 w 157545"/>
+                <a:gd name="connsiteY2" fmla="*/ 134262 h 157545"/>
+                <a:gd name="connsiteX3" fmla="*/ 23283 w 157545"/>
+                <a:gd name="connsiteY3" fmla="*/ 78773 h 157545"/>
+                <a:gd name="connsiteX4" fmla="*/ 78773 w 157545"/>
+                <a:gd name="connsiteY4" fmla="*/ 23283 h 157545"/>
+                <a:gd name="connsiteX5" fmla="*/ 78773 w 157545"/>
+                <a:gd name="connsiteY5" fmla="*/ 0 h 157545"/>
+                <a:gd name="connsiteX6" fmla="*/ 0 w 157545"/>
+                <a:gd name="connsiteY6" fmla="*/ 78773 h 157545"/>
+                <a:gd name="connsiteX7" fmla="*/ 78773 w 157545"/>
+                <a:gd name="connsiteY7" fmla="*/ 157545 h 157545"/>
+                <a:gd name="connsiteX8" fmla="*/ 157545 w 157545"/>
+                <a:gd name="connsiteY8" fmla="*/ 78773 h 157545"/>
+                <a:gd name="connsiteX9" fmla="*/ 78773 w 157545"/>
+                <a:gd name="connsiteY9" fmla="*/ 0 h 157545"/>
+              </a:gdLst>
+              <a:ahLst/>
+              <a:cxnLst>
+                <a:cxn ang="0">
+                  <a:pos x="connsiteX0" y="connsiteY0"/>
+                </a:cxn>
+                <a:cxn ang="0">
+                  <a:pos x="connsiteX1" y="connsiteY1"/>
+                </a:cxn>
+                <a:cxn ang="0">
+                  <a:pos x="connsiteX2" y="connsiteY2"/>
+                </a:cxn>
+                <a:cxn ang="0">
+                  <a:pos x="connsiteX3" y="connsiteY3"/>
+                </a:cxn>
+                <a:cxn ang="0">
+                  <a:pos x="connsiteX4" y="connsiteY4"/>
+                </a:cxn>
+                <a:cxn ang="0">
+                  <a:pos x="connsiteX5" y="connsiteY5"/>
+                </a:cxn>
+                <a:cxn ang="0">
+                  <a:pos x="connsiteX6" y="connsiteY6"/>
+                </a:cxn>
+                <a:cxn ang="0">
+                  <a:pos x="connsiteX7" y="connsiteY7"/>
+                </a:cxn>
+                <a:cxn ang="0">
+                  <a:pos x="connsiteX8" y="connsiteY8"/>
+                </a:cxn>
+                <a:cxn ang="0">
+                  <a:pos x="connsiteX9" y="connsiteY9"/>
+                </a:cxn>
+              </a:cxnLst>
+              <a:rect l="l" t="t" r="r" b="b"/>
+              <a:pathLst>
+                <a:path w="157545" h="157545">
+                  <a:moveTo>
+                    <a:pt x="78773" y="23283"/>
+                  </a:moveTo>
+                  <a:cubicBezTo>
+                    <a:pt x="109419" y="23283"/>
+                    <a:pt x="134262" y="48126"/>
+                    <a:pt x="134262" y="78773"/>
+                  </a:cubicBezTo>
+                  <a:cubicBezTo>
+                    <a:pt x="134262" y="109419"/>
+                    <a:pt x="109419" y="134262"/>
+                    <a:pt x="78773" y="134262"/>
+                  </a:cubicBezTo>
+                  <a:cubicBezTo>
+                    <a:pt x="48126" y="134262"/>
+                    <a:pt x="23283" y="109419"/>
+                    <a:pt x="23283" y="78773"/>
+                  </a:cubicBezTo>
+                  <a:cubicBezTo>
+                    <a:pt x="23312" y="48139"/>
+                    <a:pt x="48139" y="23312"/>
+                    <a:pt x="78773" y="23283"/>
+                  </a:cubicBezTo>
+                  <a:moveTo>
+                    <a:pt x="78773" y="0"/>
+                  </a:moveTo>
+                  <a:cubicBezTo>
+                    <a:pt x="35268" y="0"/>
+                    <a:pt x="0" y="35268"/>
+                    <a:pt x="0" y="78773"/>
+                  </a:cubicBezTo>
+                  <a:cubicBezTo>
+                    <a:pt x="0" y="122277"/>
+                    <a:pt x="35268" y="157545"/>
+                    <a:pt x="78773" y="157545"/>
+                  </a:cubicBezTo>
+                  <a:cubicBezTo>
+                    <a:pt x="122277" y="157545"/>
+                    <a:pt x="157545" y="122277"/>
+                    <a:pt x="157545" y="78773"/>
+                  </a:cubicBezTo>
+                  <a:cubicBezTo>
+                    <a:pt x="157545" y="35268"/>
+                    <a:pt x="122277" y="0"/>
+                    <a:pt x="78773" y="0"/>
+                  </a:cubicBezTo>
+                  <a:close/>
+                </a:path>
+              </a:pathLst>
+            </a:custGeom>
+            <a:solidFill>
+              <a:schemeClr val="accent2"/>
+            </a:solidFill>
+            <a:ln w="751" cap="flat">
+              <a:noFill/>
+              <a:prstDash val="solid"/>
+              <a:miter/>
+            </a:ln>
+          </p:spPr>
+          <p:txBody>
+            <a:bodyPr rtlCol="0" anchor="ctr"/>
+            <a:lstStyle/>
+            <a:p>
+              <a:endParaRPr lang="en-US"/>
+            </a:p>
+          </p:txBody>
+        </p:sp>
+      </p:grpSp>
+      <p:cxnSp>
+        <p:nvCxnSpPr>
+          <p:cNvPr id="17" name="Straight Connector 16">
+            <a:extLst>
+              <a:ext uri="{FF2B5EF4-FFF2-40B4-BE49-F238E27FC236}">
+                <a16:creationId xmlns:a16="http://schemas.microsoft.com/office/drawing/2014/main" id="{C49DA8F6-BCC1-4447-B54C-57856834B94B}"/>
+              </a:ext>
+              <a:ext uri="{C183D7F6-B498-43B3-948B-1728B52AA6E4}">
+                <adec:decorative xmlns:adec="http://schemas.microsoft.com/office/drawing/2017/decorative" val="1"/>
+              </a:ext>
+            </a:extLst>
+          </p:cNvPr>
+          <p:cNvCxnSpPr>
+            <a:cxnSpLocks noGrp="1" noRot="1" noChangeAspect="1" noMove="1" noResize="1" noEditPoints="1" noAdjustHandles="1" noChangeArrowheads="1" noChangeShapeType="1"/>
+          </p:cNvCxnSpPr>
+          <p:nvPr>
+            <p:extLst>
+              <p:ext uri="{386F3935-93C4-4BCD-93E2-E3B085C9AB24}">
+                <p16:designElem xmlns:p16="http://schemas.microsoft.com/office/powerpoint/2015/main" val="1"/>
+              </p:ext>
+            </p:extLst>
+          </p:nvPr>
+        </p:nvCxnSpPr>
+        <p:spPr>
+          <a:xfrm>
+            <a:off x="623622" y="3610394"/>
+            <a:ext cx="0" cy="3238728"/>
+          </a:xfrm>
+          <a:prstGeom prst="line">
+            <a:avLst/>
+          </a:prstGeom>
+          <a:ln w="25400" cap="sq">
+            <a:gradFill flip="none" rotWithShape="1">
+              <a:gsLst>
+                <a:gs pos="0">
+                  <a:schemeClr val="accent1"/>
+                </a:gs>
+                <a:gs pos="100000">
+                  <a:schemeClr val="accent2"/>
+                </a:gs>
+              </a:gsLst>
+              <a:lin ang="5400000" scaled="0"/>
+              <a:tileRect/>
+            </a:gradFill>
+            <a:bevel/>
+          </a:ln>
+        </p:spPr>
+        <p:style>
+          <a:lnRef idx="1">
+            <a:schemeClr val="accent1"/>
+          </a:lnRef>
+          <a:fillRef idx="0">
+            <a:schemeClr val="accent1"/>
+          </a:fillRef>
+          <a:effectRef idx="0">
+            <a:schemeClr val="accent1"/>
+          </a:effectRef>
+          <a:fontRef idx="minor">
+            <a:schemeClr val="tx1"/>
+          </a:fontRef>
+        </p:style>
+      </p:cxnSp>
+      <p:graphicFrame>
+        <p:nvGraphicFramePr>
+          <p:cNvPr id="6" name="Rectangle 1">
+            <a:extLst>
+              <a:ext uri="{FF2B5EF4-FFF2-40B4-BE49-F238E27FC236}">
+                <a16:creationId xmlns:a16="http://schemas.microsoft.com/office/drawing/2014/main" id="{BC41156A-F2F1-6F77-848E-169DA64A04F2}"/>
+              </a:ext>
+            </a:extLst>
+          </p:cNvPr>
+          <p:cNvGraphicFramePr>
+            <a:graphicFrameLocks noGrp="1"/>
+          </p:cNvGraphicFramePr>
+          <p:nvPr>
+            <p:ph idx="1"/>
+            <p:extLst>
+              <p:ext uri="{D42A27DB-BD31-4B8C-83A1-F6EECF244321}">
+                <p14:modId xmlns:p14="http://schemas.microsoft.com/office/powerpoint/2010/main" val="1673092828"/>
+              </p:ext>
+            </p:extLst>
+          </p:nvPr>
+        </p:nvGraphicFramePr>
+        <p:xfrm>
+          <a:off x="1188062" y="1825625"/>
+          <a:ext cx="9356107" cy="4394200"/>
+        </p:xfrm>
+        <a:graphic>
+          <a:graphicData uri="http://schemas.openxmlformats.org/drawingml/2006/diagram">
+            <dgm:relIds xmlns:dgm="http://schemas.openxmlformats.org/drawingml/2006/diagram" xmlns:r="http://schemas.openxmlformats.org/officeDocument/2006/relationships" r:dm="rId2" r:lo="rId3" r:qs="rId4" r:cs="rId5"/>
+          </a:graphicData>
+        </a:graphic>
+      </p:graphicFrame>
+    </p:spTree>
+    <p:extLst>
+      <p:ext uri="{BB962C8B-B14F-4D97-AF65-F5344CB8AC3E}">
+        <p14:creationId xmlns:p14="http://schemas.microsoft.com/office/powerpoint/2010/main" val="503411533"/>
+      </p:ext>
+    </p:extLst>
+  </p:cSld>
+  <p:clrMapOvr>
+    <a:masterClrMapping/>
+  </p:clrMapOvr>
+</p:sld>
+</file>
+
+<file path=ppt/slides/slide11.xml><?xml version="1.0" encoding="utf-8"?>
 <p:sld xmlns:a="http://schemas.openxmlformats.org/drawingml/2006/main" xmlns:r="http://schemas.openxmlformats.org/officeDocument/2006/relationships" xmlns:p="http://schemas.openxmlformats.org/presentationml/2006/main">
   <p:cSld>
     <p:bg>
@@ -27971,7 +28747,7 @@
         </p:nvSpPr>
         <p:spPr bwMode="auto">
           <a:xfrm>
-            <a:off x="761802" y="2743200"/>
+            <a:off x="761802" y="2636195"/>
             <a:ext cx="4646905" cy="3613149"/>
           </a:xfrm>
           <a:prstGeom prst="rect">
@@ -28139,7 +28915,21 @@
                 </a:ln>
                 <a:effectLst/>
               </a:rPr>
-              <a:t>Accuracy = 0.72</a:t>
+              <a:t>Accuracy </a:t>
+            </a:r>
+            <a:r>
+              <a:rPr kumimoji="0" lang="en-US" altLang="en-US" sz="1700" b="0" i="0" u="none" strike="noStrike" cap="none" normalizeH="0" baseline="0" dirty="0">
+                <a:ln>
+                  <a:noFill/>
+                </a:ln>
+                <a:solidFill>
+                  <a:schemeClr val="bg2">
+                    <a:lumMod val="75000"/>
+                  </a:schemeClr>
+                </a:solidFill>
+                <a:effectLst/>
+              </a:rPr>
+              <a:t>= 0.72</a:t>
             </a:r>
           </a:p>
           <a:p>
@@ -28166,7 +28956,21 @@
                 </a:ln>
                 <a:effectLst/>
               </a:rPr>
-              <a:t>ROC-AUC = 0.76</a:t>
+              <a:t>ROC-AUC </a:t>
+            </a:r>
+            <a:r>
+              <a:rPr kumimoji="0" lang="en-US" altLang="en-US" sz="1700" b="0" i="0" u="none" strike="noStrike" cap="none" normalizeH="0" baseline="0" dirty="0">
+                <a:ln>
+                  <a:noFill/>
+                </a:ln>
+                <a:solidFill>
+                  <a:schemeClr val="bg2">
+                    <a:lumMod val="75000"/>
+                  </a:schemeClr>
+                </a:solidFill>
+                <a:effectLst/>
+              </a:rPr>
+              <a:t>= 0.76</a:t>
             </a:r>
           </a:p>
           <a:p>
@@ -28193,7 +28997,21 @@
                 </a:ln>
                 <a:effectLst/>
               </a:rPr>
-              <a:t>F1 (Decline Class) = 0.59</a:t>
+              <a:t>F1 (Decline Class) </a:t>
+            </a:r>
+            <a:r>
+              <a:rPr kumimoji="0" lang="en-US" altLang="en-US" sz="1700" b="0" i="0" u="none" strike="noStrike" cap="none" normalizeH="0" baseline="0" dirty="0">
+                <a:ln>
+                  <a:noFill/>
+                </a:ln>
+                <a:solidFill>
+                  <a:schemeClr val="bg2">
+                    <a:lumMod val="75000"/>
+                  </a:schemeClr>
+                </a:solidFill>
+                <a:effectLst/>
+              </a:rPr>
+              <a:t>= 0.59</a:t>
             </a:r>
           </a:p>
           <a:p>
@@ -28463,7 +29281,7 @@
         </p:nvSpPr>
         <p:spPr>
           <a:xfrm>
-            <a:off x="838200" y="1195697"/>
+            <a:off x="923750" y="1188385"/>
             <a:ext cx="3200400" cy="4238118"/>
           </a:xfrm>
         </p:spPr>
@@ -28474,7 +29292,7 @@
           <a:lstStyle/>
           <a:p>
             <a:r>
-              <a:rPr lang="en-US">
+              <a:rPr lang="en-US" dirty="0">
                 <a:solidFill>
                   <a:schemeClr val="bg1"/>
                 </a:solidFill>
@@ -30739,7 +31557,7 @@
             <p:ph idx="1"/>
             <p:extLst>
               <p:ext uri="{D42A27DB-BD31-4B8C-83A1-F6EECF244321}">
-                <p14:modId xmlns:p14="http://schemas.microsoft.com/office/powerpoint/2010/main" val="2761879138"/>
+                <p14:modId xmlns:p14="http://schemas.microsoft.com/office/powerpoint/2010/main" val="2371353146"/>
               </p:ext>
             </p:extLst>
           </p:nvPr>
@@ -31923,7 +32741,7 @@
         </p:nvSpPr>
         <p:spPr>
           <a:xfrm>
-            <a:off x="838200" y="1195697"/>
+            <a:off x="849750" y="1297885"/>
             <a:ext cx="3200400" cy="4238118"/>
           </a:xfrm>
         </p:spPr>
@@ -31933,8 +32751,9 @@
           </a:bodyPr>
           <a:lstStyle/>
           <a:p>
+            <a:pPr algn="ctr"/>
             <a:r>
-              <a:rPr lang="en-US">
+              <a:rPr lang="en-US" dirty="0">
                 <a:solidFill>
                   <a:schemeClr val="bg1"/>
                 </a:solidFill>
@@ -33789,7 +34608,7 @@
             <p:ph idx="1"/>
             <p:extLst>
               <p:ext uri="{D42A27DB-BD31-4B8C-83A1-F6EECF244321}">
-                <p14:modId xmlns:p14="http://schemas.microsoft.com/office/powerpoint/2010/main" val="3518614399"/>
+                <p14:modId xmlns:p14="http://schemas.microsoft.com/office/powerpoint/2010/main" val="3531113788"/>
               </p:ext>
             </p:extLst>
           </p:nvPr>
@@ -33818,6 +34637,241 @@
 </file>
 
 <file path=ppt/slides/slide8.xml><?xml version="1.0" encoding="utf-8"?>
+<p:sld xmlns:a="http://schemas.openxmlformats.org/drawingml/2006/main" xmlns:r="http://schemas.openxmlformats.org/officeDocument/2006/relationships" xmlns:p="http://schemas.openxmlformats.org/presentationml/2006/main">
+  <p:cSld>
+    <p:spTree>
+      <p:nvGrpSpPr>
+        <p:cNvPr id="1" name=""/>
+        <p:cNvGrpSpPr/>
+        <p:nvPr/>
+      </p:nvGrpSpPr>
+      <p:grpSpPr>
+        <a:xfrm>
+          <a:off x="0" y="0"/>
+          <a:ext cx="0" cy="0"/>
+          <a:chOff x="0" y="0"/>
+          <a:chExt cx="0" cy="0"/>
+        </a:xfrm>
+      </p:grpSpPr>
+      <p:sp>
+        <p:nvSpPr>
+          <p:cNvPr id="2" name="Title 1">
+            <a:extLst>
+              <a:ext uri="{FF2B5EF4-FFF2-40B4-BE49-F238E27FC236}">
+                <a16:creationId xmlns:a16="http://schemas.microsoft.com/office/drawing/2014/main" id="{60134515-5D97-E264-FC7F-7EA0A34BA48B}"/>
+              </a:ext>
+            </a:extLst>
+          </p:cNvPr>
+          <p:cNvSpPr>
+            <a:spLocks noGrp="1"/>
+          </p:cNvSpPr>
+          <p:nvPr>
+            <p:ph type="title"/>
+          </p:nvPr>
+        </p:nvSpPr>
+        <p:spPr>
+          <a:xfrm>
+            <a:off x="732504" y="296299"/>
+            <a:ext cx="4323735" cy="1325563"/>
+          </a:xfrm>
+        </p:spPr>
+        <p:txBody>
+          <a:bodyPr/>
+          <a:lstStyle/>
+          <a:p>
+            <a:pPr algn="ctr"/>
+            <a:r>
+              <a:rPr lang="en-US" dirty="0"/>
+              <a:t>Confusion Matrix</a:t>
+            </a:r>
+            <a:br>
+              <a:rPr lang="en-US" dirty="0"/>
+            </a:br>
+            <a:r>
+              <a:rPr lang="en-US" sz="1800" dirty="0"/>
+              <a:t>for test data</a:t>
+            </a:r>
+            <a:endParaRPr lang="en-US" dirty="0"/>
+          </a:p>
+        </p:txBody>
+      </p:sp>
+      <p:sp>
+        <p:nvSpPr>
+          <p:cNvPr id="4" name="Title 1">
+            <a:extLst>
+              <a:ext uri="{FF2B5EF4-FFF2-40B4-BE49-F238E27FC236}">
+                <a16:creationId xmlns:a16="http://schemas.microsoft.com/office/drawing/2014/main" id="{0EFDB7C2-786E-CF24-37F7-4F54EDAFB942}"/>
+              </a:ext>
+            </a:extLst>
+          </p:cNvPr>
+          <p:cNvSpPr txBox="1">
+            <a:spLocks/>
+          </p:cNvSpPr>
+          <p:nvPr/>
+        </p:nvSpPr>
+        <p:spPr>
+          <a:xfrm>
+            <a:off x="7135761" y="346812"/>
+            <a:ext cx="4323735" cy="1031927"/>
+          </a:xfrm>
+          <a:prstGeom prst="rect">
+            <a:avLst/>
+          </a:prstGeom>
+        </p:spPr>
+        <p:txBody>
+          <a:bodyPr vert="horz" lIns="91440" tIns="45720" rIns="91440" bIns="45720" rtlCol="0" anchor="ctr">
+            <a:normAutofit/>
+          </a:bodyPr>
+          <a:lstStyle>
+            <a:lvl1pPr algn="l" defTabSz="914400" rtl="0" eaLnBrk="1" latinLnBrk="0" hangingPunct="1">
+              <a:lnSpc>
+                <a:spcPct val="90000"/>
+              </a:lnSpc>
+              <a:spcBef>
+                <a:spcPct val="0"/>
+              </a:spcBef>
+              <a:buNone/>
+              <a:defRPr sz="4400" kern="1200">
+                <a:solidFill>
+                  <a:schemeClr val="tx1"/>
+                </a:solidFill>
+                <a:latin typeface="+mj-lt"/>
+                <a:ea typeface="+mj-ea"/>
+                <a:cs typeface="+mj-cs"/>
+              </a:defRPr>
+            </a:lvl1pPr>
+          </a:lstStyle>
+          <a:p>
+            <a:pPr algn="ctr"/>
+            <a:r>
+              <a:rPr lang="en-US" dirty="0"/>
+              <a:t>ROC Curve</a:t>
+            </a:r>
+          </a:p>
+        </p:txBody>
+      </p:sp>
+      <p:cxnSp>
+        <p:nvCxnSpPr>
+          <p:cNvPr id="6" name="Straight Connector 5">
+            <a:extLst>
+              <a:ext uri="{FF2B5EF4-FFF2-40B4-BE49-F238E27FC236}">
+                <a16:creationId xmlns:a16="http://schemas.microsoft.com/office/drawing/2014/main" id="{92B2D541-22EB-5DC3-1196-AD27F4BE1D98}"/>
+              </a:ext>
+            </a:extLst>
+          </p:cNvPr>
+          <p:cNvCxnSpPr/>
+          <p:nvPr/>
+        </p:nvCxnSpPr>
+        <p:spPr>
+          <a:xfrm>
+            <a:off x="6017342" y="1160205"/>
+            <a:ext cx="0" cy="4945626"/>
+          </a:xfrm>
+          <a:prstGeom prst="line">
+            <a:avLst/>
+          </a:prstGeom>
+        </p:spPr>
+        <p:style>
+          <a:lnRef idx="2">
+            <a:schemeClr val="accent1"/>
+          </a:lnRef>
+          <a:fillRef idx="0">
+            <a:schemeClr val="accent1"/>
+          </a:fillRef>
+          <a:effectRef idx="1">
+            <a:schemeClr val="accent1"/>
+          </a:effectRef>
+          <a:fontRef idx="minor">
+            <a:schemeClr val="tx1"/>
+          </a:fontRef>
+        </p:style>
+      </p:cxnSp>
+      <p:pic>
+        <p:nvPicPr>
+          <p:cNvPr id="8" name="Picture 7" descr="A blue and white graph&#10;&#10;AI-generated content may be incorrect.">
+            <a:extLst>
+              <a:ext uri="{FF2B5EF4-FFF2-40B4-BE49-F238E27FC236}">
+                <a16:creationId xmlns:a16="http://schemas.microsoft.com/office/drawing/2014/main" id="{78D47061-7D19-92B2-630A-2390E88F58E6}"/>
+              </a:ext>
+            </a:extLst>
+          </p:cNvPr>
+          <p:cNvPicPr>
+            <a:picLocks noChangeAspect="1"/>
+          </p:cNvPicPr>
+          <p:nvPr/>
+        </p:nvPicPr>
+        <p:blipFill>
+          <a:blip r:embed="rId2">
+            <a:extLst>
+              <a:ext uri="{28A0092B-C50C-407E-A947-70E740481C1C}">
+                <a14:useLocalDpi xmlns:a14="http://schemas.microsoft.com/office/drawing/2010/main" val="0"/>
+              </a:ext>
+            </a:extLst>
+          </a:blip>
+          <a:stretch>
+            <a:fillRect/>
+          </a:stretch>
+        </p:blipFill>
+        <p:spPr>
+          <a:xfrm>
+            <a:off x="608366" y="2000860"/>
+            <a:ext cx="4572009" cy="3657607"/>
+          </a:xfrm>
+          <a:prstGeom prst="rect">
+            <a:avLst/>
+          </a:prstGeom>
+        </p:spPr>
+      </p:pic>
+      <p:pic>
+        <p:nvPicPr>
+          <p:cNvPr id="10" name="Picture 9" descr="A graph with a line and a point&#10;&#10;AI-generated content may be incorrect.">
+            <a:extLst>
+              <a:ext uri="{FF2B5EF4-FFF2-40B4-BE49-F238E27FC236}">
+                <a16:creationId xmlns:a16="http://schemas.microsoft.com/office/drawing/2014/main" id="{20FC94A7-2AD7-497A-3B21-EE2E42C9D67E}"/>
+              </a:ext>
+            </a:extLst>
+          </p:cNvPr>
+          <p:cNvPicPr>
+            <a:picLocks noChangeAspect="1"/>
+          </p:cNvPicPr>
+          <p:nvPr/>
+        </p:nvPicPr>
+        <p:blipFill>
+          <a:blip r:embed="rId3">
+            <a:extLst>
+              <a:ext uri="{28A0092B-C50C-407E-A947-70E740481C1C}">
+                <a14:useLocalDpi xmlns:a14="http://schemas.microsoft.com/office/drawing/2010/main" val="0"/>
+              </a:ext>
+            </a:extLst>
+          </a:blip>
+          <a:stretch>
+            <a:fillRect/>
+          </a:stretch>
+        </p:blipFill>
+        <p:spPr>
+          <a:xfrm>
+            <a:off x="6345495" y="1423215"/>
+            <a:ext cx="5486411" cy="4572009"/>
+          </a:xfrm>
+          <a:prstGeom prst="rect">
+            <a:avLst/>
+          </a:prstGeom>
+        </p:spPr>
+      </p:pic>
+    </p:spTree>
+    <p:extLst>
+      <p:ext uri="{BB962C8B-B14F-4D97-AF65-F5344CB8AC3E}">
+        <p14:creationId xmlns:p14="http://schemas.microsoft.com/office/powerpoint/2010/main" val="767075932"/>
+      </p:ext>
+    </p:extLst>
+  </p:cSld>
+  <p:clrMapOvr>
+    <a:masterClrMapping/>
+  </p:clrMapOvr>
+</p:sld>
+</file>
+
+<file path=ppt/slides/slide9.xml><?xml version="1.0" encoding="utf-8"?>
 <p:sld xmlns:a="http://schemas.openxmlformats.org/drawingml/2006/main" xmlns:r="http://schemas.openxmlformats.org/officeDocument/2006/relationships" xmlns:p="http://schemas.openxmlformats.org/presentationml/2006/main">
   <p:cSld>
     <p:bg>
@@ -33972,731 +35026,6 @@
     <p:extLst>
       <p:ext uri="{BB962C8B-B14F-4D97-AF65-F5344CB8AC3E}">
         <p14:creationId xmlns:p14="http://schemas.microsoft.com/office/powerpoint/2010/main" val="1121383547"/>
-      </p:ext>
-    </p:extLst>
-  </p:cSld>
-  <p:clrMapOvr>
-    <a:masterClrMapping/>
-  </p:clrMapOvr>
-</p:sld>
-</file>
-
-<file path=ppt/slides/slide9.xml><?xml version="1.0" encoding="utf-8"?>
-<p:sld xmlns:a="http://schemas.openxmlformats.org/drawingml/2006/main" xmlns:r="http://schemas.openxmlformats.org/officeDocument/2006/relationships" xmlns:p="http://schemas.openxmlformats.org/presentationml/2006/main">
-  <p:cSld>
-    <p:bg>
-      <p:bgPr>
-        <a:solidFill>
-          <a:schemeClr val="bg1"/>
-        </a:solidFill>
-        <a:effectLst/>
-      </p:bgPr>
-    </p:bg>
-    <p:spTree>
-      <p:nvGrpSpPr>
-        <p:cNvPr id="1" name=""/>
-        <p:cNvGrpSpPr/>
-        <p:nvPr/>
-      </p:nvGrpSpPr>
-      <p:grpSpPr>
-        <a:xfrm>
-          <a:off x="0" y="0"/>
-          <a:ext cx="0" cy="0"/>
-          <a:chOff x="0" y="0"/>
-          <a:chExt cx="0" cy="0"/>
-        </a:xfrm>
-      </p:grpSpPr>
-      <p:sp useBgFill="1">
-        <p:nvSpPr>
-          <p:cNvPr id="10" name="Rectangle 9">
-            <a:extLst>
-              <a:ext uri="{FF2B5EF4-FFF2-40B4-BE49-F238E27FC236}">
-                <a16:creationId xmlns:a16="http://schemas.microsoft.com/office/drawing/2014/main" id="{D9A7F3BF-8763-4074-AD77-92790AF314D1}"/>
-              </a:ext>
-              <a:ext uri="{C183D7F6-B498-43B3-948B-1728B52AA6E4}">
-                <adec:decorative xmlns:adec="http://schemas.microsoft.com/office/drawing/2017/decorative" val="1"/>
-              </a:ext>
-            </a:extLst>
-          </p:cNvPr>
-          <p:cNvSpPr>
-            <a:spLocks noGrp="1" noRot="1" noChangeAspect="1" noMove="1" noResize="1" noEditPoints="1" noAdjustHandles="1" noChangeArrowheads="1" noChangeShapeType="1" noTextEdit="1"/>
-          </p:cNvSpPr>
-          <p:nvPr>
-            <p:extLst>
-              <p:ext uri="{386F3935-93C4-4BCD-93E2-E3B085C9AB24}">
-                <p16:designElem xmlns:p16="http://schemas.microsoft.com/office/powerpoint/2015/main" val="1"/>
-              </p:ext>
-            </p:extLst>
-          </p:nvPr>
-        </p:nvSpPr>
-        <p:spPr>
-          <a:xfrm>
-            <a:off x="0" y="0"/>
-            <a:ext cx="12192000" cy="6858000"/>
-          </a:xfrm>
-          <a:prstGeom prst="rect">
-            <a:avLst/>
-          </a:prstGeom>
-          <a:ln>
-            <a:noFill/>
-          </a:ln>
-        </p:spPr>
-        <p:style>
-          <a:lnRef idx="2">
-            <a:schemeClr val="accent1">
-              <a:shade val="50000"/>
-            </a:schemeClr>
-          </a:lnRef>
-          <a:fillRef idx="1">
-            <a:schemeClr val="accent1"/>
-          </a:fillRef>
-          <a:effectRef idx="0">
-            <a:schemeClr val="accent1"/>
-          </a:effectRef>
-          <a:fontRef idx="minor">
-            <a:schemeClr val="lt1"/>
-          </a:fontRef>
-        </p:style>
-        <p:txBody>
-          <a:bodyPr rtlCol="0" anchor="ctr"/>
-          <a:lstStyle/>
-          <a:p>
-            <a:pPr algn="ctr"/>
-            <a:endParaRPr lang="en-US"/>
-          </a:p>
-        </p:txBody>
-      </p:sp>
-      <p:sp>
-        <p:nvSpPr>
-          <p:cNvPr id="2" name="Title 1">
-            <a:extLst>
-              <a:ext uri="{FF2B5EF4-FFF2-40B4-BE49-F238E27FC236}">
-                <a16:creationId xmlns:a16="http://schemas.microsoft.com/office/drawing/2014/main" id="{B92FA667-82AD-BB13-1E68-DD6F5D8CBC7B}"/>
-              </a:ext>
-            </a:extLst>
-          </p:cNvPr>
-          <p:cNvSpPr>
-            <a:spLocks noGrp="1"/>
-          </p:cNvSpPr>
-          <p:nvPr>
-            <p:ph type="title"/>
-          </p:nvPr>
-        </p:nvSpPr>
-        <p:spPr>
-          <a:xfrm>
-            <a:off x="1188069" y="381935"/>
-            <a:ext cx="9356106" cy="1200329"/>
-          </a:xfrm>
-        </p:spPr>
-        <p:txBody>
-          <a:bodyPr anchor="t">
-            <a:normAutofit/>
-          </a:bodyPr>
-          <a:lstStyle/>
-          <a:p>
-            <a:r>
-              <a:rPr lang="en-US" sz="6800"/>
-              <a:t>Limitations &amp; Next Steps</a:t>
-            </a:r>
-          </a:p>
-        </p:txBody>
-      </p:sp>
-      <p:grpSp>
-        <p:nvGrpSpPr>
-          <p:cNvPr id="12" name="Group 11">
-            <a:extLst>
-              <a:ext uri="{FF2B5EF4-FFF2-40B4-BE49-F238E27FC236}">
-                <a16:creationId xmlns:a16="http://schemas.microsoft.com/office/drawing/2014/main" id="{7A9648D6-B41B-42D0-A817-AE2607B0B5B8}"/>
-              </a:ext>
-              <a:ext uri="{C183D7F6-B498-43B3-948B-1728B52AA6E4}">
-                <adec:decorative xmlns:adec="http://schemas.microsoft.com/office/drawing/2017/decorative" val="1"/>
-              </a:ext>
-            </a:extLst>
-          </p:cNvPr>
-          <p:cNvGrpSpPr>
-            <a:grpSpLocks noGrp="1" noUngrp="1" noRot="1" noChangeAspect="1" noMove="1" noResize="1"/>
-          </p:cNvGrpSpPr>
-          <p:nvPr>
-            <p:extLst>
-              <p:ext uri="{386F3935-93C4-4BCD-93E2-E3B085C9AB24}">
-                <p16:designElem xmlns:p16="http://schemas.microsoft.com/office/powerpoint/2015/main" val="1"/>
-              </p:ext>
-            </p:extLst>
-          </p:nvPr>
-        </p:nvGrpSpPr>
-        <p:grpSpPr>
-          <a:xfrm>
-            <a:off x="10994200" y="554152"/>
-            <a:ext cx="574177" cy="1075866"/>
-            <a:chOff x="10994200" y="554152"/>
-            <a:chExt cx="574177" cy="1075866"/>
-          </a:xfrm>
-        </p:grpSpPr>
-        <p:sp>
-          <p:nvSpPr>
-            <p:cNvPr id="13" name="Graphic 11">
-              <a:extLst>
-                <a:ext uri="{FF2B5EF4-FFF2-40B4-BE49-F238E27FC236}">
-                  <a16:creationId xmlns:a16="http://schemas.microsoft.com/office/drawing/2014/main" id="{6CB927A4-E432-4310-9CD5-E89FF5063179}"/>
-                </a:ext>
-                <a:ext uri="{C183D7F6-B498-43B3-948B-1728B52AA6E4}">
-                  <adec:decorative xmlns:adec="http://schemas.microsoft.com/office/drawing/2017/decorative" val="1"/>
-                </a:ext>
-              </a:extLst>
-            </p:cNvPr>
-            <p:cNvSpPr/>
-            <p:nvPr>
-              <p:extLst>
-                <p:ext uri="{386F3935-93C4-4BCD-93E2-E3B085C9AB24}">
-                  <p16:designElem xmlns:p16="http://schemas.microsoft.com/office/powerpoint/2015/main" val="1"/>
-                </p:ext>
-              </p:extLst>
-            </p:nvPr>
-          </p:nvSpPr>
-          <p:spPr>
-            <a:xfrm>
-              <a:off x="11013369" y="554152"/>
-              <a:ext cx="171515" cy="171515"/>
-            </a:xfrm>
-            <a:custGeom>
-              <a:avLst/>
-              <a:gdLst>
-                <a:gd name="connsiteX0" fmla="*/ 159874 w 171515"/>
-                <a:gd name="connsiteY0" fmla="*/ 74116 h 171515"/>
-                <a:gd name="connsiteX1" fmla="*/ 97399 w 171515"/>
-                <a:gd name="connsiteY1" fmla="*/ 74116 h 171515"/>
-                <a:gd name="connsiteX2" fmla="*/ 97399 w 171515"/>
-                <a:gd name="connsiteY2" fmla="*/ 11641 h 171515"/>
-                <a:gd name="connsiteX3" fmla="*/ 85758 w 171515"/>
-                <a:gd name="connsiteY3" fmla="*/ 0 h 171515"/>
-                <a:gd name="connsiteX4" fmla="*/ 74116 w 171515"/>
-                <a:gd name="connsiteY4" fmla="*/ 11641 h 171515"/>
-                <a:gd name="connsiteX5" fmla="*/ 74116 w 171515"/>
-                <a:gd name="connsiteY5" fmla="*/ 74116 h 171515"/>
-                <a:gd name="connsiteX6" fmla="*/ 11641 w 171515"/>
-                <a:gd name="connsiteY6" fmla="*/ 74116 h 171515"/>
-                <a:gd name="connsiteX7" fmla="*/ 0 w 171515"/>
-                <a:gd name="connsiteY7" fmla="*/ 85758 h 171515"/>
-                <a:gd name="connsiteX8" fmla="*/ 11641 w 171515"/>
-                <a:gd name="connsiteY8" fmla="*/ 97399 h 171515"/>
-                <a:gd name="connsiteX9" fmla="*/ 74116 w 171515"/>
-                <a:gd name="connsiteY9" fmla="*/ 97399 h 171515"/>
-                <a:gd name="connsiteX10" fmla="*/ 74116 w 171515"/>
-                <a:gd name="connsiteY10" fmla="*/ 159874 h 171515"/>
-                <a:gd name="connsiteX11" fmla="*/ 85758 w 171515"/>
-                <a:gd name="connsiteY11" fmla="*/ 171515 h 171515"/>
-                <a:gd name="connsiteX12" fmla="*/ 97399 w 171515"/>
-                <a:gd name="connsiteY12" fmla="*/ 159874 h 171515"/>
-                <a:gd name="connsiteX13" fmla="*/ 97399 w 171515"/>
-                <a:gd name="connsiteY13" fmla="*/ 97399 h 171515"/>
-                <a:gd name="connsiteX14" fmla="*/ 159874 w 171515"/>
-                <a:gd name="connsiteY14" fmla="*/ 97399 h 171515"/>
-                <a:gd name="connsiteX15" fmla="*/ 171515 w 171515"/>
-                <a:gd name="connsiteY15" fmla="*/ 85758 h 171515"/>
-                <a:gd name="connsiteX16" fmla="*/ 159874 w 171515"/>
-                <a:gd name="connsiteY16" fmla="*/ 74116 h 171515"/>
-              </a:gdLst>
-              <a:ahLst/>
-              <a:cxnLst>
-                <a:cxn ang="0">
-                  <a:pos x="connsiteX0" y="connsiteY0"/>
-                </a:cxn>
-                <a:cxn ang="0">
-                  <a:pos x="connsiteX1" y="connsiteY1"/>
-                </a:cxn>
-                <a:cxn ang="0">
-                  <a:pos x="connsiteX2" y="connsiteY2"/>
-                </a:cxn>
-                <a:cxn ang="0">
-                  <a:pos x="connsiteX3" y="connsiteY3"/>
-                </a:cxn>
-                <a:cxn ang="0">
-                  <a:pos x="connsiteX4" y="connsiteY4"/>
-                </a:cxn>
-                <a:cxn ang="0">
-                  <a:pos x="connsiteX5" y="connsiteY5"/>
-                </a:cxn>
-                <a:cxn ang="0">
-                  <a:pos x="connsiteX6" y="connsiteY6"/>
-                </a:cxn>
-                <a:cxn ang="0">
-                  <a:pos x="connsiteX7" y="connsiteY7"/>
-                </a:cxn>
-                <a:cxn ang="0">
-                  <a:pos x="connsiteX8" y="connsiteY8"/>
-                </a:cxn>
-                <a:cxn ang="0">
-                  <a:pos x="connsiteX9" y="connsiteY9"/>
-                </a:cxn>
-                <a:cxn ang="0">
-                  <a:pos x="connsiteX10" y="connsiteY10"/>
-                </a:cxn>
-                <a:cxn ang="0">
-                  <a:pos x="connsiteX11" y="connsiteY11"/>
-                </a:cxn>
-                <a:cxn ang="0">
-                  <a:pos x="connsiteX12" y="connsiteY12"/>
-                </a:cxn>
-                <a:cxn ang="0">
-                  <a:pos x="connsiteX13" y="connsiteY13"/>
-                </a:cxn>
-                <a:cxn ang="0">
-                  <a:pos x="connsiteX14" y="connsiteY14"/>
-                </a:cxn>
-                <a:cxn ang="0">
-                  <a:pos x="connsiteX15" y="connsiteY15"/>
-                </a:cxn>
-                <a:cxn ang="0">
-                  <a:pos x="connsiteX16" y="connsiteY16"/>
-                </a:cxn>
-              </a:cxnLst>
-              <a:rect l="l" t="t" r="r" b="b"/>
-              <a:pathLst>
-                <a:path w="171515" h="171515">
-                  <a:moveTo>
-                    <a:pt x="159874" y="74116"/>
-                  </a:moveTo>
-                  <a:lnTo>
-                    <a:pt x="97399" y="74116"/>
-                  </a:lnTo>
-                  <a:lnTo>
-                    <a:pt x="97399" y="11641"/>
-                  </a:lnTo>
-                  <a:cubicBezTo>
-                    <a:pt x="97399" y="5212"/>
-                    <a:pt x="92187" y="0"/>
-                    <a:pt x="85758" y="0"/>
-                  </a:cubicBezTo>
-                  <a:cubicBezTo>
-                    <a:pt x="79328" y="0"/>
-                    <a:pt x="74116" y="5212"/>
-                    <a:pt x="74116" y="11641"/>
-                  </a:cubicBezTo>
-                  <a:lnTo>
-                    <a:pt x="74116" y="74116"/>
-                  </a:lnTo>
-                  <a:lnTo>
-                    <a:pt x="11641" y="74116"/>
-                  </a:lnTo>
-                  <a:cubicBezTo>
-                    <a:pt x="5212" y="74116"/>
-                    <a:pt x="0" y="79328"/>
-                    <a:pt x="0" y="85758"/>
-                  </a:cubicBezTo>
-                  <a:cubicBezTo>
-                    <a:pt x="0" y="92187"/>
-                    <a:pt x="5212" y="97399"/>
-                    <a:pt x="11641" y="97399"/>
-                  </a:cubicBezTo>
-                  <a:lnTo>
-                    <a:pt x="74116" y="97399"/>
-                  </a:lnTo>
-                  <a:lnTo>
-                    <a:pt x="74116" y="159874"/>
-                  </a:lnTo>
-                  <a:cubicBezTo>
-                    <a:pt x="74116" y="166303"/>
-                    <a:pt x="79328" y="171515"/>
-                    <a:pt x="85758" y="171515"/>
-                  </a:cubicBezTo>
-                  <a:cubicBezTo>
-                    <a:pt x="92187" y="171515"/>
-                    <a:pt x="97399" y="166303"/>
-                    <a:pt x="97399" y="159874"/>
-                  </a:cubicBezTo>
-                  <a:lnTo>
-                    <a:pt x="97399" y="97399"/>
-                  </a:lnTo>
-                  <a:lnTo>
-                    <a:pt x="159874" y="97399"/>
-                  </a:lnTo>
-                  <a:cubicBezTo>
-                    <a:pt x="166303" y="97399"/>
-                    <a:pt x="171515" y="92187"/>
-                    <a:pt x="171515" y="85758"/>
-                  </a:cubicBezTo>
-                  <a:cubicBezTo>
-                    <a:pt x="171515" y="79328"/>
-                    <a:pt x="166303" y="74116"/>
-                    <a:pt x="159874" y="74116"/>
-                  </a:cubicBezTo>
-                  <a:close/>
-                </a:path>
-              </a:pathLst>
-            </a:custGeom>
-            <a:solidFill>
-              <a:schemeClr val="accent2"/>
-            </a:solidFill>
-            <a:ln w="776" cap="flat">
-              <a:noFill/>
-              <a:prstDash val="solid"/>
-              <a:miter/>
-            </a:ln>
-          </p:spPr>
-          <p:txBody>
-            <a:bodyPr rtlCol="0" anchor="ctr"/>
-            <a:lstStyle/>
-            <a:p>
-              <a:endParaRPr lang="en-US"/>
-            </a:p>
-          </p:txBody>
-        </p:sp>
-        <p:sp>
-          <p:nvSpPr>
-            <p:cNvPr id="14" name="Graphic 10">
-              <a:extLst>
-                <a:ext uri="{FF2B5EF4-FFF2-40B4-BE49-F238E27FC236}">
-                  <a16:creationId xmlns:a16="http://schemas.microsoft.com/office/drawing/2014/main" id="{E3020543-B24B-4EC4-8FFC-8DD88EEA91A8}"/>
-                </a:ext>
-                <a:ext uri="{C183D7F6-B498-43B3-948B-1728B52AA6E4}">
-                  <adec:decorative xmlns:adec="http://schemas.microsoft.com/office/drawing/2017/decorative" val="1"/>
-                </a:ext>
-              </a:extLst>
-            </p:cNvPr>
-            <p:cNvSpPr/>
-            <p:nvPr>
-              <p:extLst>
-                <p:ext uri="{386F3935-93C4-4BCD-93E2-E3B085C9AB24}">
-                  <p16:designElem xmlns:p16="http://schemas.microsoft.com/office/powerpoint/2015/main" val="1"/>
-                </p:ext>
-              </p:extLst>
-            </p:nvPr>
-          </p:nvSpPr>
-          <p:spPr>
-            <a:xfrm>
-              <a:off x="11455951" y="837005"/>
-              <a:ext cx="112426" cy="112426"/>
-            </a:xfrm>
-            <a:custGeom>
-              <a:avLst/>
-              <a:gdLst>
-                <a:gd name="connsiteX0" fmla="*/ 112426 w 112426"/>
-                <a:gd name="connsiteY0" fmla="*/ 56213 h 112426"/>
-                <a:gd name="connsiteX1" fmla="*/ 56213 w 112426"/>
-                <a:gd name="connsiteY1" fmla="*/ 112426 h 112426"/>
-                <a:gd name="connsiteX2" fmla="*/ 0 w 112426"/>
-                <a:gd name="connsiteY2" fmla="*/ 56213 h 112426"/>
-                <a:gd name="connsiteX3" fmla="*/ 56213 w 112426"/>
-                <a:gd name="connsiteY3" fmla="*/ 0 h 112426"/>
-                <a:gd name="connsiteX4" fmla="*/ 112426 w 112426"/>
-                <a:gd name="connsiteY4" fmla="*/ 56213 h 112426"/>
-              </a:gdLst>
-              <a:ahLst/>
-              <a:cxnLst>
-                <a:cxn ang="0">
-                  <a:pos x="connsiteX0" y="connsiteY0"/>
-                </a:cxn>
-                <a:cxn ang="0">
-                  <a:pos x="connsiteX1" y="connsiteY1"/>
-                </a:cxn>
-                <a:cxn ang="0">
-                  <a:pos x="connsiteX2" y="connsiteY2"/>
-                </a:cxn>
-                <a:cxn ang="0">
-                  <a:pos x="connsiteX3" y="connsiteY3"/>
-                </a:cxn>
-                <a:cxn ang="0">
-                  <a:pos x="connsiteX4" y="connsiteY4"/>
-                </a:cxn>
-              </a:cxnLst>
-              <a:rect l="l" t="t" r="r" b="b"/>
-              <a:pathLst>
-                <a:path w="112426" h="112426">
-                  <a:moveTo>
-                    <a:pt x="112426" y="56213"/>
-                  </a:moveTo>
-                  <a:cubicBezTo>
-                    <a:pt x="112426" y="87259"/>
-                    <a:pt x="87259" y="112426"/>
-                    <a:pt x="56213" y="112426"/>
-                  </a:cubicBezTo>
-                  <a:cubicBezTo>
-                    <a:pt x="25167" y="112426"/>
-                    <a:pt x="0" y="87259"/>
-                    <a:pt x="0" y="56213"/>
-                  </a:cubicBezTo>
-                  <a:cubicBezTo>
-                    <a:pt x="0" y="25167"/>
-                    <a:pt x="25167" y="0"/>
-                    <a:pt x="56213" y="0"/>
-                  </a:cubicBezTo>
-                  <a:cubicBezTo>
-                    <a:pt x="87259" y="0"/>
-                    <a:pt x="112426" y="25167"/>
-                    <a:pt x="112426" y="56213"/>
-                  </a:cubicBezTo>
-                  <a:close/>
-                </a:path>
-              </a:pathLst>
-            </a:custGeom>
-            <a:solidFill>
-              <a:schemeClr val="accent2"/>
-            </a:solidFill>
-            <a:ln w="516" cap="flat">
-              <a:noFill/>
-              <a:prstDash val="solid"/>
-              <a:miter/>
-            </a:ln>
-          </p:spPr>
-          <p:txBody>
-            <a:bodyPr rtlCol="0" anchor="ctr"/>
-            <a:lstStyle/>
-            <a:p>
-              <a:endParaRPr lang="en-US"/>
-            </a:p>
-          </p:txBody>
-        </p:sp>
-        <p:sp>
-          <p:nvSpPr>
-            <p:cNvPr id="15" name="Graphic 12">
-              <a:extLst>
-                <a:ext uri="{FF2B5EF4-FFF2-40B4-BE49-F238E27FC236}">
-                  <a16:creationId xmlns:a16="http://schemas.microsoft.com/office/drawing/2014/main" id="{1453BF6C-B012-48B7-B4E8-6D7AC7C27D02}"/>
-                </a:ext>
-                <a:ext uri="{C183D7F6-B498-43B3-948B-1728B52AA6E4}">
-                  <adec:decorative xmlns:adec="http://schemas.microsoft.com/office/drawing/2017/decorative" val="1"/>
-                </a:ext>
-              </a:extLst>
-            </p:cNvPr>
-            <p:cNvSpPr/>
-            <p:nvPr>
-              <p:extLst>
-                <p:ext uri="{386F3935-93C4-4BCD-93E2-E3B085C9AB24}">
-                  <p16:designElem xmlns:p16="http://schemas.microsoft.com/office/powerpoint/2015/main" val="1"/>
-                </p:ext>
-              </p:extLst>
-            </p:nvPr>
-          </p:nvSpPr>
-          <p:spPr>
-            <a:xfrm>
-              <a:off x="10994200" y="1472473"/>
-              <a:ext cx="157545" cy="157545"/>
-            </a:xfrm>
-            <a:custGeom>
-              <a:avLst/>
-              <a:gdLst>
-                <a:gd name="connsiteX0" fmla="*/ 78773 w 157545"/>
-                <a:gd name="connsiteY0" fmla="*/ 23283 h 157545"/>
-                <a:gd name="connsiteX1" fmla="*/ 134262 w 157545"/>
-                <a:gd name="connsiteY1" fmla="*/ 78773 h 157545"/>
-                <a:gd name="connsiteX2" fmla="*/ 78773 w 157545"/>
-                <a:gd name="connsiteY2" fmla="*/ 134262 h 157545"/>
-                <a:gd name="connsiteX3" fmla="*/ 23283 w 157545"/>
-                <a:gd name="connsiteY3" fmla="*/ 78773 h 157545"/>
-                <a:gd name="connsiteX4" fmla="*/ 78773 w 157545"/>
-                <a:gd name="connsiteY4" fmla="*/ 23283 h 157545"/>
-                <a:gd name="connsiteX5" fmla="*/ 78773 w 157545"/>
-                <a:gd name="connsiteY5" fmla="*/ 0 h 157545"/>
-                <a:gd name="connsiteX6" fmla="*/ 0 w 157545"/>
-                <a:gd name="connsiteY6" fmla="*/ 78773 h 157545"/>
-                <a:gd name="connsiteX7" fmla="*/ 78773 w 157545"/>
-                <a:gd name="connsiteY7" fmla="*/ 157545 h 157545"/>
-                <a:gd name="connsiteX8" fmla="*/ 157545 w 157545"/>
-                <a:gd name="connsiteY8" fmla="*/ 78773 h 157545"/>
-                <a:gd name="connsiteX9" fmla="*/ 78773 w 157545"/>
-                <a:gd name="connsiteY9" fmla="*/ 0 h 157545"/>
-              </a:gdLst>
-              <a:ahLst/>
-              <a:cxnLst>
-                <a:cxn ang="0">
-                  <a:pos x="connsiteX0" y="connsiteY0"/>
-                </a:cxn>
-                <a:cxn ang="0">
-                  <a:pos x="connsiteX1" y="connsiteY1"/>
-                </a:cxn>
-                <a:cxn ang="0">
-                  <a:pos x="connsiteX2" y="connsiteY2"/>
-                </a:cxn>
-                <a:cxn ang="0">
-                  <a:pos x="connsiteX3" y="connsiteY3"/>
-                </a:cxn>
-                <a:cxn ang="0">
-                  <a:pos x="connsiteX4" y="connsiteY4"/>
-                </a:cxn>
-                <a:cxn ang="0">
-                  <a:pos x="connsiteX5" y="connsiteY5"/>
-                </a:cxn>
-                <a:cxn ang="0">
-                  <a:pos x="connsiteX6" y="connsiteY6"/>
-                </a:cxn>
-                <a:cxn ang="0">
-                  <a:pos x="connsiteX7" y="connsiteY7"/>
-                </a:cxn>
-                <a:cxn ang="0">
-                  <a:pos x="connsiteX8" y="connsiteY8"/>
-                </a:cxn>
-                <a:cxn ang="0">
-                  <a:pos x="connsiteX9" y="connsiteY9"/>
-                </a:cxn>
-              </a:cxnLst>
-              <a:rect l="l" t="t" r="r" b="b"/>
-              <a:pathLst>
-                <a:path w="157545" h="157545">
-                  <a:moveTo>
-                    <a:pt x="78773" y="23283"/>
-                  </a:moveTo>
-                  <a:cubicBezTo>
-                    <a:pt x="109419" y="23283"/>
-                    <a:pt x="134262" y="48126"/>
-                    <a:pt x="134262" y="78773"/>
-                  </a:cubicBezTo>
-                  <a:cubicBezTo>
-                    <a:pt x="134262" y="109419"/>
-                    <a:pt x="109419" y="134262"/>
-                    <a:pt x="78773" y="134262"/>
-                  </a:cubicBezTo>
-                  <a:cubicBezTo>
-                    <a:pt x="48126" y="134262"/>
-                    <a:pt x="23283" y="109419"/>
-                    <a:pt x="23283" y="78773"/>
-                  </a:cubicBezTo>
-                  <a:cubicBezTo>
-                    <a:pt x="23312" y="48139"/>
-                    <a:pt x="48139" y="23312"/>
-                    <a:pt x="78773" y="23283"/>
-                  </a:cubicBezTo>
-                  <a:moveTo>
-                    <a:pt x="78773" y="0"/>
-                  </a:moveTo>
-                  <a:cubicBezTo>
-                    <a:pt x="35268" y="0"/>
-                    <a:pt x="0" y="35268"/>
-                    <a:pt x="0" y="78773"/>
-                  </a:cubicBezTo>
-                  <a:cubicBezTo>
-                    <a:pt x="0" y="122277"/>
-                    <a:pt x="35268" y="157545"/>
-                    <a:pt x="78773" y="157545"/>
-                  </a:cubicBezTo>
-                  <a:cubicBezTo>
-                    <a:pt x="122277" y="157545"/>
-                    <a:pt x="157545" y="122277"/>
-                    <a:pt x="157545" y="78773"/>
-                  </a:cubicBezTo>
-                  <a:cubicBezTo>
-                    <a:pt x="157545" y="35268"/>
-                    <a:pt x="122277" y="0"/>
-                    <a:pt x="78773" y="0"/>
-                  </a:cubicBezTo>
-                  <a:close/>
-                </a:path>
-              </a:pathLst>
-            </a:custGeom>
-            <a:solidFill>
-              <a:schemeClr val="accent2"/>
-            </a:solidFill>
-            <a:ln w="751" cap="flat">
-              <a:noFill/>
-              <a:prstDash val="solid"/>
-              <a:miter/>
-            </a:ln>
-          </p:spPr>
-          <p:txBody>
-            <a:bodyPr rtlCol="0" anchor="ctr"/>
-            <a:lstStyle/>
-            <a:p>
-              <a:endParaRPr lang="en-US"/>
-            </a:p>
-          </p:txBody>
-        </p:sp>
-      </p:grpSp>
-      <p:cxnSp>
-        <p:nvCxnSpPr>
-          <p:cNvPr id="17" name="Straight Connector 16">
-            <a:extLst>
-              <a:ext uri="{FF2B5EF4-FFF2-40B4-BE49-F238E27FC236}">
-                <a16:creationId xmlns:a16="http://schemas.microsoft.com/office/drawing/2014/main" id="{C49DA8F6-BCC1-4447-B54C-57856834B94B}"/>
-              </a:ext>
-              <a:ext uri="{C183D7F6-B498-43B3-948B-1728B52AA6E4}">
-                <adec:decorative xmlns:adec="http://schemas.microsoft.com/office/drawing/2017/decorative" val="1"/>
-              </a:ext>
-            </a:extLst>
-          </p:cNvPr>
-          <p:cNvCxnSpPr>
-            <a:cxnSpLocks noGrp="1" noRot="1" noChangeAspect="1" noMove="1" noResize="1" noEditPoints="1" noAdjustHandles="1" noChangeArrowheads="1" noChangeShapeType="1"/>
-          </p:cNvCxnSpPr>
-          <p:nvPr>
-            <p:extLst>
-              <p:ext uri="{386F3935-93C4-4BCD-93E2-E3B085C9AB24}">
-                <p16:designElem xmlns:p16="http://schemas.microsoft.com/office/powerpoint/2015/main" val="1"/>
-              </p:ext>
-            </p:extLst>
-          </p:nvPr>
-        </p:nvCxnSpPr>
-        <p:spPr>
-          <a:xfrm>
-            <a:off x="623622" y="3610394"/>
-            <a:ext cx="0" cy="3238728"/>
-          </a:xfrm>
-          <a:prstGeom prst="line">
-            <a:avLst/>
-          </a:prstGeom>
-          <a:ln w="25400" cap="sq">
-            <a:gradFill flip="none" rotWithShape="1">
-              <a:gsLst>
-                <a:gs pos="0">
-                  <a:schemeClr val="accent1"/>
-                </a:gs>
-                <a:gs pos="100000">
-                  <a:schemeClr val="accent2"/>
-                </a:gs>
-              </a:gsLst>
-              <a:lin ang="5400000" scaled="0"/>
-              <a:tileRect/>
-            </a:gradFill>
-            <a:bevel/>
-          </a:ln>
-        </p:spPr>
-        <p:style>
-          <a:lnRef idx="1">
-            <a:schemeClr val="accent1"/>
-          </a:lnRef>
-          <a:fillRef idx="0">
-            <a:schemeClr val="accent1"/>
-          </a:fillRef>
-          <a:effectRef idx="0">
-            <a:schemeClr val="accent1"/>
-          </a:effectRef>
-          <a:fontRef idx="minor">
-            <a:schemeClr val="tx1"/>
-          </a:fontRef>
-        </p:style>
-      </p:cxnSp>
-      <p:graphicFrame>
-        <p:nvGraphicFramePr>
-          <p:cNvPr id="6" name="Rectangle 1">
-            <a:extLst>
-              <a:ext uri="{FF2B5EF4-FFF2-40B4-BE49-F238E27FC236}">
-                <a16:creationId xmlns:a16="http://schemas.microsoft.com/office/drawing/2014/main" id="{BC41156A-F2F1-6F77-848E-169DA64A04F2}"/>
-              </a:ext>
-            </a:extLst>
-          </p:cNvPr>
-          <p:cNvGraphicFramePr>
-            <a:graphicFrameLocks noGrp="1"/>
-          </p:cNvGraphicFramePr>
-          <p:nvPr>
-            <p:ph idx="1"/>
-            <p:extLst>
-              <p:ext uri="{D42A27DB-BD31-4B8C-83A1-F6EECF244321}">
-                <p14:modId xmlns:p14="http://schemas.microsoft.com/office/powerpoint/2010/main" val="1673092828"/>
-              </p:ext>
-            </p:extLst>
-          </p:nvPr>
-        </p:nvGraphicFramePr>
-        <p:xfrm>
-          <a:off x="1188062" y="1825625"/>
-          <a:ext cx="9356107" cy="4394200"/>
-        </p:xfrm>
-        <a:graphic>
-          <a:graphicData uri="http://schemas.openxmlformats.org/drawingml/2006/diagram">
-            <dgm:relIds xmlns:dgm="http://schemas.openxmlformats.org/drawingml/2006/diagram" xmlns:r="http://schemas.openxmlformats.org/officeDocument/2006/relationships" r:dm="rId2" r:lo="rId3" r:qs="rId4" r:cs="rId5"/>
-          </a:graphicData>
-        </a:graphic>
-      </p:graphicFrame>
-    </p:spTree>
-    <p:extLst>
-      <p:ext uri="{BB962C8B-B14F-4D97-AF65-F5344CB8AC3E}">
-        <p14:creationId xmlns:p14="http://schemas.microsoft.com/office/powerpoint/2010/main" val="503411533"/>
       </p:ext>
     </p:extLst>
   </p:cSld>
